--- a/decks/day1/module-7-lab-kickoff.pptx
+++ b/decks/day1/module-7-lab-kickoff.pptx
@@ -2141,7 +2141,7 @@
             <a:off x="365760" y="1097280"/>
             <a:ext cx="8412480" cy="1737360"/>
           </a:xfrm>
-          <a:prstGeom prst="1">
+          <a:prstGeom prst="rect">
             <a:avLst/>
           </a:prstGeom>
           <a:solidFill>
@@ -2506,7 +2506,7 @@
             <a:off x="365760" y="1097280"/>
             <a:ext cx="8412480" cy="1371600"/>
           </a:xfrm>
-          <a:prstGeom prst="1">
+          <a:prstGeom prst="rect">
             <a:avLst/>
           </a:prstGeom>
           <a:solidFill>
@@ -2666,7 +2666,7 @@
             <a:off x="365760" y="2926080"/>
             <a:ext cx="8412480" cy="1920240"/>
           </a:xfrm>
-          <a:prstGeom prst="1">
+          <a:prstGeom prst="rect">
             <a:avLst/>
           </a:prstGeom>
           <a:solidFill>
@@ -4110,7 +4110,7 @@
             <a:off x="365760" y="4343400"/>
             <a:ext cx="8412480" cy="457200"/>
           </a:xfrm>
-          <a:prstGeom prst="1">
+          <a:prstGeom prst="rect">
             <a:avLst/>
           </a:prstGeom>
           <a:solidFill>

--- a/decks/day1/module-7-lab-kickoff.pptx
+++ b/decks/day1/module-7-lab-kickoff.pptx
@@ -1931,7 +1931,7 @@
                 <a:ea typeface="Calibri" pitchFamily="34" charset="-122"/>
                 <a:cs typeface="Calibri" pitchFamily="34" charset="-120"/>
               </a:rPr>
-              <a:t>Part A — client-side agent (Python or C#)</a:t>
+              <a:t>Part A — Prompt agent (created in the portal, no code to maintain)</a:t>
             </a:r>
             <a:endParaRPr lang="en-US" sz="1500" dirty="0"/>
           </a:p>
@@ -1952,7 +1952,7 @@
                 <a:ea typeface="Calibri" pitchFamily="34" charset="-122"/>
                 <a:cs typeface="Calibri" pitchFamily="34" charset="-120"/>
               </a:rPr>
-              <a:t>Part B — Foundry PromptAgent (versioned, portal-configured)</a:t>
+              <a:t>Part B — Your own code calling the Responses API (MAF in Python or C#)</a:t>
             </a:r>
             <a:endParaRPr lang="en-US" sz="1500" dirty="0"/>
           </a:p>
@@ -1973,7 +1973,7 @@
                 <a:ea typeface="Calibri" pitchFamily="34" charset="-122"/>
                 <a:cs typeface="Calibri" pitchFamily="34" charset="-120"/>
               </a:rPr>
-              <a:t>Part C (bonus) — Foundry HostedAgent (non-versioned)</a:t>
+              <a:t>Part C — Hosted agent (connect to a pre-deployed one; explore what Foundry manages)</a:t>
             </a:r>
             <a:endParaRPr lang="en-US" sz="1500" dirty="0"/>
           </a:p>
@@ -2781,7 +2781,7 @@
                 <a:ea typeface="Consolas" pitchFamily="34" charset="-122"/>
                 <a:cs typeface="Consolas" pitchFamily="34" charset="-120"/>
               </a:rPr>
-              <a:t>│   ├── part_a_client_side_agent.py</a:t>
+              <a:t>│   ├── part_a_prompt_agent.py</a:t>
             </a:r>
             <a:endParaRPr lang="en-US" sz="1200" dirty="0"/>
           </a:p>
@@ -2798,7 +2798,7 @@
                 <a:ea typeface="Consolas" pitchFamily="34" charset="-122"/>
                 <a:cs typeface="Consolas" pitchFamily="34" charset="-120"/>
               </a:rPr>
-              <a:t>│   ├── part_b_foundry_prompt_agent.py</a:t>
+              <a:t>│   ├── part_b_responses_api.py</a:t>
             </a:r>
             <a:endParaRPr lang="en-US" sz="1200" dirty="0"/>
           </a:p>
@@ -2815,7 +2815,7 @@
                 <a:ea typeface="Consolas" pitchFamily="34" charset="-122"/>
                 <a:cs typeface="Consolas" pitchFamily="34" charset="-120"/>
               </a:rPr>
-              <a:t>│   └── part_c_foundry_hosted_agent.py</a:t>
+              <a:t>│   └── part_c_hosted_agent.py</a:t>
             </a:r>
             <a:endParaRPr lang="en-US" sz="1200" dirty="0"/>
           </a:p>
@@ -2832,7 +2832,7 @@
                 <a:ea typeface="Consolas" pitchFamily="34" charset="-122"/>
                 <a:cs typeface="Consolas" pitchFamily="34" charset="-120"/>
               </a:rPr>
-              <a:t>└── csharp/PartA_ClientSideAgent/</a:t>
+              <a:t>└── csharp/PartB_ResponsesApi/</a:t>
             </a:r>
             <a:endParaRPr lang="en-US" sz="1200" dirty="0"/>
           </a:p>
@@ -3005,7 +3005,7 @@
                 <a:ea typeface="Calibri" pitchFamily="34" charset="-122"/>
                 <a:cs typeface="Calibri" pitchFamily="34" charset="-120"/>
               </a:rPr>
-              <a:t>Part A runs — client-side agent handles non-streaming and streaming multi-turn questions</a:t>
+              <a:t>Part A runs — you created a Prompt agent in the Foundry portal (version 1.0) and your MAF app connects to it</a:t>
             </a:r>
             <a:endParaRPr lang="en-US" sz="1500" dirty="0"/>
           </a:p>
@@ -3026,7 +3026,28 @@
                 <a:ea typeface="Calibri" pitchFamily="34" charset="-122"/>
                 <a:cs typeface="Calibri" pitchFamily="34" charset="-120"/>
               </a:rPr>
-              <a:t>Part B runs — you created a PromptAgent in the portal (version 1.0) and MAF connects to it</a:t>
+              <a:t>Part B runs — your MAF app calls the Responses API and handles multi-turn, streaming, and non-streaming</a:t>
+            </a:r>
+            <a:endParaRPr lang="en-US" sz="1500" dirty="0"/>
+          </a:p>
+          <a:p>
+            <a:pPr marL="342900" indent="-342900">
+              <a:spcAft>
+                <a:spcPts val="600"/>
+              </a:spcAft>
+              <a:buSzPct val="100000"/>
+              <a:buChar char="•"/>
+            </a:pPr>
+            <a:r>
+              <a:rPr lang="en-US" sz="1500" dirty="0">
+                <a:solidFill>
+                  <a:srgbClr val="212121"/>
+                </a:solidFill>
+                <a:latin typeface="Calibri" pitchFamily="34" charset="0"/>
+                <a:ea typeface="Calibri" pitchFamily="34" charset="-122"/>
+                <a:cs typeface="Calibri" pitchFamily="34" charset="-120"/>
+              </a:rPr>
+              <a:t>Part C runs — you connect to a pre-deployed Hosted agent and walked the portal to see what Foundry manages</a:t>
             </a:r>
             <a:endParaRPr lang="en-US" sz="1500" dirty="0"/>
           </a:p>
@@ -3582,7 +3603,7 @@
                 <a:ea typeface="Calibri" pitchFamily="34" charset="-122"/>
                 <a:cs typeface="Calibri" pitchFamily="34" charset="-120"/>
               </a:rPr>
-              <a:t>Python — package missing — `uv sync` from labs/day1/python/</a:t>
+              <a:t>Python — package missing — uv sync from labs/day1/python/</a:t>
             </a:r>
             <a:endParaRPr lang="en-US" sz="1400" dirty="0"/>
           </a:p>
@@ -4051,7 +4072,7 @@
                 <a:ea typeface="Calibri" pitchFamily="34" charset="-122"/>
                 <a:cs typeface="Calibri" pitchFamily="34" charset="-120"/>
               </a:rPr>
-              <a:t>Same functional agent, three hosting styles.</a:t>
+              <a:t>Same underlying docs-assistant behavior — three ways to run an agent with Foundry.</a:t>
             </a:r>
             <a:endParaRPr lang="en-US" sz="1500" dirty="0"/>
           </a:p>

--- a/decks/day1/module-7-lab-kickoff.pptx
+++ b/decks/day1/module-7-lab-kickoff.pptx
@@ -862,7 +862,7 @@
           <a:p>
             <a:r>
               <a:rPr lang="en-US" dirty="0"/>
-              <a:t>The reflection is the deliverable. Part C is bonus.</a:t>
+              <a:t>The reflection is the deliverable. Focus on trade-offs, not on maximum coverage.</a:t>
             </a:r>
             <a:endParaRPr lang="en-US" dirty="0"/>
           </a:p>
@@ -1126,7 +1126,7 @@
           <a:p>
             <a:r>
               <a:rPr lang="en-US" dirty="0"/>
-              <a:t>Set realistic expectations. Attendees who hit 90 min on Part A should ask for help.</a:t>
+              <a:t>Set realistic expectations. Attendees who hit 90 min on Part C should ask for help.</a:t>
             </a:r>
             <a:endParaRPr lang="en-US" dirty="0"/>
           </a:p>
@@ -1952,7 +1952,7 @@
                 <a:ea typeface="Calibri" pitchFamily="34" charset="-122"/>
                 <a:cs typeface="Calibri" pitchFamily="34" charset="-120"/>
               </a:rPr>
-              <a:t>Part B — Your own code calling the Responses API (MAF in Python or C#)</a:t>
+              <a:t>Part B — Hosted agent (connect to a pre-deployed one; explore what Foundry manages)</a:t>
             </a:r>
             <a:endParaRPr lang="en-US" sz="1500" dirty="0"/>
           </a:p>
@@ -1973,7 +1973,7 @@
                 <a:ea typeface="Calibri" pitchFamily="34" charset="-122"/>
                 <a:cs typeface="Calibri" pitchFamily="34" charset="-120"/>
               </a:rPr>
-              <a:t>Part C — Hosted agent (connect to a pre-deployed one; explore what Foundry manages)</a:t>
+              <a:t>Part C — Your own code calling the Responses API (MAF in Python or C#)</a:t>
             </a:r>
             <a:endParaRPr lang="en-US" sz="1500" dirty="0"/>
           </a:p>
@@ -2798,7 +2798,7 @@
                 <a:ea typeface="Consolas" pitchFamily="34" charset="-122"/>
                 <a:cs typeface="Consolas" pitchFamily="34" charset="-120"/>
               </a:rPr>
-              <a:t>│   ├── part_b_responses_api.py</a:t>
+              <a:t>│   ├── part_b_hosted_agent.py</a:t>
             </a:r>
             <a:endParaRPr lang="en-US" sz="1200" dirty="0"/>
           </a:p>
@@ -2815,7 +2815,7 @@
                 <a:ea typeface="Consolas" pitchFamily="34" charset="-122"/>
                 <a:cs typeface="Consolas" pitchFamily="34" charset="-120"/>
               </a:rPr>
-              <a:t>│   └── part_c_hosted_agent.py</a:t>
+              <a:t>│   └── part_c_responses_api.py</a:t>
             </a:r>
             <a:endParaRPr lang="en-US" sz="1200" dirty="0"/>
           </a:p>
@@ -2832,7 +2832,7 @@
                 <a:ea typeface="Consolas" pitchFamily="34" charset="-122"/>
                 <a:cs typeface="Consolas" pitchFamily="34" charset="-120"/>
               </a:rPr>
-              <a:t>└── csharp/PartB_ResponsesApi/</a:t>
+              <a:t>└── csharp/PartC_ResponsesApi/</a:t>
             </a:r>
             <a:endParaRPr lang="en-US" sz="1200" dirty="0"/>
           </a:p>
@@ -3026,7 +3026,7 @@
                 <a:ea typeface="Calibri" pitchFamily="34" charset="-122"/>
                 <a:cs typeface="Calibri" pitchFamily="34" charset="-120"/>
               </a:rPr>
-              <a:t>Part B runs — your MAF app calls the Responses API and handles multi-turn, streaming, and non-streaming</a:t>
+              <a:t>Part B runs — you connect to a pre-deployed Hosted agent and walk the portal to see what Foundry manages</a:t>
             </a:r>
             <a:endParaRPr lang="en-US" sz="1500" dirty="0"/>
           </a:p>
@@ -3047,7 +3047,7 @@
                 <a:ea typeface="Calibri" pitchFamily="34" charset="-122"/>
                 <a:cs typeface="Calibri" pitchFamily="34" charset="-120"/>
               </a:rPr>
-              <a:t>Part C runs — you connect to a pre-deployed Hosted agent and walked the portal to see what Foundry manages</a:t>
+              <a:t>Part C runs — your MAF app calls the Responses API and handles multi-turn, streaming, and non-streaming</a:t>
             </a:r>
             <a:endParaRPr lang="en-US" sz="1500" dirty="0"/>
           </a:p>
@@ -3089,7 +3089,7 @@
                 <a:ea typeface="Calibri" pitchFamily="34" charset="-122"/>
                 <a:cs typeface="Calibri" pitchFamily="34" charset="-120"/>
               </a:rPr>
-              <a:t>Where did thread state live in Part A vs. Part B?</a:t>
+              <a:t>What does Foundry manage for you in Parts A and B that you'd handle yourself in Part C?</a:t>
             </a:r>
             <a:endParaRPr lang="en-US" sz="1500" dirty="0"/>
           </a:p>
@@ -3776,7 +3776,7 @@
                 <a:ea typeface="Calibri" pitchFamily="34" charset="-122"/>
                 <a:cs typeface="Calibri" pitchFamily="34" charset="-120"/>
               </a:rPr>
-              <a:t>Part A → ~45 min for most attendees</a:t>
+              <a:t>Part A → about 30 min (portal setup + connection)</a:t>
             </a:r>
             <a:endParaRPr lang="en-US" sz="1500" dirty="0"/>
           </a:p>
@@ -3797,7 +3797,7 @@
                 <a:ea typeface="Calibri" pitchFamily="34" charset="-122"/>
                 <a:cs typeface="Calibri" pitchFamily="34" charset="-120"/>
               </a:rPr>
-              <a:t>Part B → ~45 min including portal setup</a:t>
+              <a:t>Part B → about 30 min (connect + portal exploration)</a:t>
             </a:r>
             <a:endParaRPr lang="en-US" sz="1500" dirty="0"/>
           </a:p>
@@ -3818,7 +3818,7 @@
                 <a:ea typeface="Calibri" pitchFamily="34" charset="-122"/>
                 <a:cs typeface="Calibri" pitchFamily="34" charset="-120"/>
               </a:rPr>
-              <a:t>Part C → ~20 min</a:t>
+              <a:t>Part C → about 45 min (most of the code writing lives here; stretch deploy adds ~30 min)</a:t>
             </a:r>
             <a:endParaRPr lang="en-US" sz="1500" dirty="0"/>
           </a:p>
@@ -4072,7 +4072,7 @@
                 <a:ea typeface="Calibri" pitchFamily="34" charset="-122"/>
                 <a:cs typeface="Calibri" pitchFamily="34" charset="-120"/>
               </a:rPr>
-              <a:t>Same underlying docs-assistant behavior — three ways to run an agent with Foundry.</a:t>
+              <a:t>Same underlying docs-assistant behavior — three hosting options with Foundry.</a:t>
             </a:r>
             <a:endParaRPr lang="en-US" sz="1500" dirty="0"/>
           </a:p>

--- a/decks/day1/module-7-lab-kickoff.pptx
+++ b/decks/day1/module-7-lab-kickoff.pptx
@@ -510,7 +510,10 @@
           <a:p>
             <a:r>
               <a:rPr lang="en-US" dirty="0"/>
-              <a:t>Short module. Objective: everyone leaves the live session with a green light on their environment. Async lab starts immediately after.</a:t>
+              <a:t>• Short module — 25 min
+• Objective: every attendee leaves live session with a GREEN LIGHT on env
+• Async lab starts immediately after
+• The reflection is the deliverable, not the code</a:t>
             </a:r>
             <a:endParaRPr lang="en-US" dirty="0"/>
           </a:p>
@@ -598,7 +601,11 @@
           <a:p>
             <a:r>
               <a:rPr lang="en-US" dirty="0"/>
-              <a:t>Emphasize reflection &gt; code. The reflection.md is the actual deliverable.</a:t>
+              <a:t>• Emphasize: reflection &gt; code
+• reflection.md is the actual deliverable
+• Attendees who write 3 solid reflection answers &gt; attendees who complete all 3 parts
+• Preview the 4 reflection questions — don't wait for them to read the lab
+• Same underlying docs-assistant behavior three ways</a:t>
             </a:r>
             <a:endParaRPr lang="en-US" dirty="0"/>
           </a:p>
@@ -686,7 +693,12 @@
           <a:p>
             <a:r>
               <a:rPr lang="en-US" dirty="0"/>
-              <a:t>Do a live show-of-hands: 'raise your hand if az login didn't work.' Fix issues in real time before they leave the room.</a:t>
+              <a:t>• Live show-of-hands moment
+• Ask: 'raise your hand if az login didn't work'
+• Ask: 'raise your hand if python --version doesn't show 3.11+'
+• Ask: 'raise your hand if you don't have your project endpoint yet'
+• Fix issues in real time — do NOT let them accumulate to async time
+• If more than 20% of attendees are stuck, delay the lab kickoff</a:t>
             </a:r>
             <a:endParaRPr lang="en-US" dirty="0"/>
           </a:p>
@@ -774,7 +786,11 @@
           <a:p>
             <a:r>
               <a:rPr lang="en-US" dirty="0"/>
-              <a:t>Walk through the file layout so nothing feels mysterious. Show the actual repo URL.</a:t>
+              <a:t>• Walk through the file layout so nothing feels mysterious
+• Show the actual repo URL live: github.com/JimPiquant/Building-AI-Apps-and-Agents
+• Explain uv briefly: 'uv sync creates a .venv and installs deps'
+• Point out .env.example → copy to .env → fill in
+• Never commit .env</a:t>
             </a:r>
             <a:endParaRPr lang="en-US" dirty="0"/>
           </a:p>
@@ -862,7 +878,14 @@
           <a:p>
             <a:r>
               <a:rPr lang="en-US" dirty="0"/>
-              <a:t>The reflection is the deliverable. Focus on trade-offs, not on maximum coverage.</a:t>
+              <a:t>• The reflection is the deliverable, not the code output
+• Focus on TRADE-OFFS between paths, not on maximum coverage
+• Four questions to answer:
+•   1. Which path felt fastest to iterate on and why?
+•   2. What does Foundry manage in A/B that you'd handle in C?
+•   3. For a Publix scenario you know, which path would you pick?
+•   4. What would you want to try next?
+• Attendee who completes Parts A + C with good reflection &gt; attendee who completes all 3 with none</a:t>
             </a:r>
             <a:endParaRPr lang="en-US" dirty="0"/>
           </a:p>
@@ -950,7 +973,11 @@
           <a:p>
             <a:r>
               <a:rPr lang="en-US" dirty="0"/>
-              <a:t>Set the norm that asking is encouraged. First-hour blocker rate matters more than final completion rate.</a:t>
+              <a:t>• Set the norm: asking questions is encouraged, not embarrassing
+• First-hour blocker rate matters more than final completion rate
+• Channels: workshop chat for blockers, pair programming for stuck code
+• Facilitator is on during async time; response times vary
+• If stuck &gt; 20 min on the same thing, ping the channel</a:t>
             </a:r>
             <a:endParaRPr lang="en-US" dirty="0"/>
           </a:p>
@@ -1038,7 +1065,12 @@
           <a:p>
             <a:r>
               <a:rPr lang="en-US" dirty="0"/>
-              <a:t>This is a look-before-you-leap slide. Save the async portion from the same-question-x-15 problem.</a:t>
+              <a:t>• Look-before-you-leap slide — this saves you 15 identical questions later
+• Walk through the 4 gotchas quickly
+• az login OK but 401 → Foundry User role missing at resource scope
+• FOUNDRY_PROJECT_ENDPOINT not found → copy from .env.example
+• Model deployment name mismatch → not the same as the model name
+• Python packages missing → uv sync from labs/day1/python/</a:t>
             </a:r>
             <a:endParaRPr lang="en-US" dirty="0"/>
           </a:p>
@@ -1126,7 +1158,12 @@
           <a:p>
             <a:r>
               <a:rPr lang="en-US" dirty="0"/>
-              <a:t>Set realistic expectations. Attendees who hit 90 min on Part C should ask for help.</a:t>
+              <a:t>• Set realistic expectations before they start
+• Part A: ~30 min · Part B: ~30 min · Part C: ~45 min
+• Reflection commit: ~10 min
+• Total: ~2 hours of async work
+• Attendees who hit 90 min on Part C should ping the channel
+• Going long often means an env or RBAC issue, not a code issue</a:t>
             </a:r>
             <a:endParaRPr lang="en-US" dirty="0"/>
           </a:p>

--- a/decks/day1/module-7-lab-kickoff.pptx
+++ b/decks/day1/module-7-lab-kickoff.pptx
@@ -14,9 +14,10 @@
     <p:sldId id="262" r:id="rId8"/>
     <p:sldId id="263" r:id="rId9"/>
     <p:sldId id="264" r:id="rId10"/>
+    <p:sldId id="265" r:id="rId11"/>
   </p:sldIdLst>
   <p:notesMasterIdLst>
-    <p:notesMasterId r:id="rId11"/>
+    <p:notesMasterId r:id="rId12"/>
   </p:notesMasterIdLst>
   <p:sldSz cx="9144000" cy="5143500"/>
   <p:notesSz cx="5143500" cy="9144000"/>
@@ -555,6 +556,97 @@
 </p:notes>
 </file>
 
+<file path=ppt/notesSlides/notesSlide10.xml><?xml version="1.0" encoding="utf-8"?>
+<p:notes xmlns:a="http://schemas.openxmlformats.org/drawingml/2006/main" xmlns:r="http://schemas.openxmlformats.org/officeDocument/2006/relationships" xmlns:p="http://schemas.openxmlformats.org/presentationml/2006/main">
+  <p:cSld>
+    <p:spTree>
+      <p:nvGrpSpPr>
+        <p:cNvPr id="1" name=""/>
+        <p:cNvGrpSpPr/>
+        <p:nvPr/>
+      </p:nvGrpSpPr>
+      <p:grpSpPr>
+        <a:xfrm>
+          <a:off x="0" y="0"/>
+          <a:ext cx="0" cy="0"/>
+          <a:chOff x="0" y="0"/>
+          <a:chExt cx="0" cy="0"/>
+        </a:xfrm>
+      </p:grpSpPr>
+      <p:sp>
+        <p:nvSpPr>
+          <p:cNvPr id="2" name="Slide Image Placeholder 1"/>
+          <p:cNvSpPr>
+            <a:spLocks noGrp="1" noRot="1" noChangeAspect="1"/>
+          </p:cNvSpPr>
+          <p:nvPr>
+            <p:ph type="sldImg"/>
+          </p:nvPr>
+        </p:nvSpPr>
+        <p:spPr/>
+      </p:sp>
+      <p:sp>
+        <p:nvSpPr>
+          <p:cNvPr id="3" name="Notes Placeholder 2"/>
+          <p:cNvSpPr>
+            <a:spLocks noGrp="1"/>
+          </p:cNvSpPr>
+          <p:nvPr>
+            <p:ph type="body" idx="1"/>
+          </p:nvPr>
+        </p:nvSpPr>
+        <p:spPr/>
+        <p:txBody>
+          <a:bodyPr/>
+          <a:lstStyle/>
+          <a:p>
+            <a:r>
+              <a:rPr lang="en-US" dirty="0"/>
+              <a:t>• Sign-off · Day 1 wrap
+• Encourage attendees to start the lab in a small pair or group if async time doesn't line up individually
+• Reinforce the capstone seed one more time
+• Confirm no vocabulary confusion (Prompt agent / Hosted agent / Path C) before releasing</a:t>
+            </a:r>
+            <a:endParaRPr lang="en-US" dirty="0"/>
+          </a:p>
+        </p:txBody>
+      </p:sp>
+      <p:sp>
+        <p:nvSpPr>
+          <p:cNvPr id="4" name="Slide Number Placeholder 3"/>
+          <p:cNvSpPr>
+            <a:spLocks noGrp="1"/>
+          </p:cNvSpPr>
+          <p:nvPr>
+            <p:ph type="sldNum" sz="quarter" idx="10"/>
+          </p:nvPr>
+        </p:nvSpPr>
+        <p:spPr/>
+        <p:txBody>
+          <a:bodyPr/>
+          <a:lstStyle/>
+          <a:p>
+            <a:fld id="{F7021451-1387-4CA6-816F-3879F97B5CBC}" type="slidenum">
+              <a:rPr lang="en-US"/>
+              <a:t>10</a:t>
+            </a:fld>
+            <a:endParaRPr lang="en-US"/>
+          </a:p>
+        </p:txBody>
+      </p:sp>
+    </p:spTree>
+    <p:extLst>
+      <p:ext uri="{BB962C8B-B14F-4D97-AF65-F5344CB8AC3E}">
+        <p14:creationId xmlns:p14="http://schemas.microsoft.com/office/powerpoint/2010/main" val="1024086991"/>
+      </p:ext>
+    </p:extLst>
+  </p:cSld>
+  <p:clrMapOvr>
+    <a:masterClrMapping/>
+  </p:clrMapOvr>
+</p:notes>
+</file>
+
 <file path=ppt/notesSlides/notesSlide2.xml><?xml version="1.0" encoding="utf-8"?>
 <p:notes xmlns:a="http://schemas.openxmlformats.org/drawingml/2006/main" xmlns:r="http://schemas.openxmlformats.org/officeDocument/2006/relationships" xmlns:p="http://schemas.openxmlformats.org/presentationml/2006/main">
   <p:cSld>
@@ -1251,7 +1343,19 @@
           <a:p>
             <a:r>
               <a:rPr lang="en-US" dirty="0"/>
-              <a:t>Sign-off. Encourage attendees to start the lab in a small pair or group if the async time doesn't line up individually.</a:t>
+              <a:t>• Plant the seed on Day 1 — attendees have all week to marinate on scenarios
+• Emphasize: solo OR small teams of 2–3, their choice
+• Timing: capstone runs ~4–6 weeks after workshop close
+• Cohort 1 target: reviews complete by end of Nov 2026 (before blackout)
+• 1:1 review is coaching, not scoring — reassure any nervous attendees
+• Every required element maps to a day of the workshop:
+•   MAF agent → Day 1
+•   Grounding + tools → Day 2
+•   MCP / production shape → Day 3
+•   Multi-agent + eval → Day 4
+•   Observability + deployment → Day 5
+• Point out reflection question 4 explicitly — it's the seed
+• Ask attendees to jot down 2–3 scenario ideas by end of the week</a:t>
             </a:r>
             <a:endParaRPr lang="en-US" dirty="0"/>
           </a:p>
@@ -1788,6 +1892,315 @@
 </p:sld>
 </file>
 
+<file path=ppt/slides/slide10.xml><?xml version="1.0" encoding="utf-8"?>
+<p:sld xmlns:a="http://schemas.openxmlformats.org/drawingml/2006/main" xmlns:r="http://schemas.openxmlformats.org/officeDocument/2006/relationships" xmlns:p="http://schemas.openxmlformats.org/presentationml/2006/main">
+  <p:cSld name="Slide 10">
+    <p:bg>
+      <p:bgPr>
+        <a:solidFill>
+          <a:srgbClr val="FFFFFF"/>
+        </a:solidFill>
+      </p:bgPr>
+    </p:bg>
+    <p:spTree>
+      <p:nvGrpSpPr>
+        <p:cNvPr id="1" name=""/>
+        <p:cNvGrpSpPr/>
+        <p:nvPr/>
+      </p:nvGrpSpPr>
+      <p:grpSpPr>
+        <a:xfrm>
+          <a:off x="0" y="0"/>
+          <a:ext cx="0" cy="0"/>
+          <a:chOff x="0" y="0"/>
+          <a:chExt cx="0" cy="0"/>
+        </a:xfrm>
+      </p:grpSpPr>
+      <p:sp>
+        <p:nvSpPr>
+          <p:cNvPr id="2" name="Shape 0"/>
+          <p:cNvSpPr/>
+          <p:nvPr/>
+        </p:nvSpPr>
+        <p:spPr>
+          <a:xfrm>
+            <a:off x="0" y="0"/>
+            <a:ext cx="54864" cy="5143500"/>
+          </a:xfrm>
+          <a:prstGeom prst="rect">
+            <a:avLst/>
+          </a:prstGeom>
+          <a:solidFill>
+            <a:srgbClr val="1E2761"/>
+          </a:solidFill>
+          <a:ln/>
+        </p:spPr>
+      </p:sp>
+      <p:sp>
+        <p:nvSpPr>
+          <p:cNvPr id="3" name="Text 1"/>
+          <p:cNvSpPr/>
+          <p:nvPr/>
+        </p:nvSpPr>
+        <p:spPr>
+          <a:xfrm>
+            <a:off x="5669280" y="274320"/>
+            <a:ext cx="3291840" cy="274320"/>
+          </a:xfrm>
+          <a:prstGeom prst="rect">
+            <a:avLst/>
+          </a:prstGeom>
+          <a:noFill/>
+          <a:ln/>
+        </p:spPr>
+        <p:txBody>
+          <a:bodyPr wrap="square" lIns="0" tIns="0" rIns="0" bIns="0" rtlCol="0" anchor="ctr"/>
+          <a:lstStyle/>
+          <a:p>
+            <a:pPr algn="r" indent="0" marL="0">
+              <a:buNone/>
+            </a:pPr>
+            <a:r>
+              <a:rPr lang="en-US" sz="1000" dirty="0">
+                <a:solidFill>
+                  <a:srgbClr val="6B7280"/>
+                </a:solidFill>
+                <a:latin typeface="Calibri" pitchFamily="34" charset="0"/>
+                <a:ea typeface="Calibri" pitchFamily="34" charset="-122"/>
+                <a:cs typeface="Calibri" pitchFamily="34" charset="-120"/>
+              </a:rPr>
+              <a:t>Day 1 · Module 7</a:t>
+            </a:r>
+            <a:endParaRPr lang="en-US" sz="1000" dirty="0"/>
+          </a:p>
+        </p:txBody>
+      </p:sp>
+      <p:sp>
+        <p:nvSpPr>
+          <p:cNvPr id="4" name="Text 2"/>
+          <p:cNvSpPr/>
+          <p:nvPr/>
+        </p:nvSpPr>
+        <p:spPr>
+          <a:xfrm>
+            <a:off x="365760" y="320040"/>
+            <a:ext cx="6217920" cy="640080"/>
+          </a:xfrm>
+          <a:prstGeom prst="rect">
+            <a:avLst/>
+          </a:prstGeom>
+          <a:noFill/>
+          <a:ln/>
+        </p:spPr>
+        <p:txBody>
+          <a:bodyPr wrap="square" lIns="0" tIns="0" rIns="0" bIns="0" rtlCol="0" anchor="ctr"/>
+          <a:lstStyle/>
+          <a:p>
+            <a:pPr indent="0" marL="0">
+              <a:buNone/>
+            </a:pPr>
+            <a:r>
+              <a:rPr lang="en-US" sz="2800" b="1" dirty="0">
+                <a:solidFill>
+                  <a:srgbClr val="1E2761"/>
+                </a:solidFill>
+                <a:latin typeface="Calibri" pitchFamily="34" charset="0"/>
+                <a:ea typeface="Calibri" pitchFamily="34" charset="-122"/>
+                <a:cs typeface="Calibri" pitchFamily="34" charset="-120"/>
+              </a:rPr>
+              <a:t>Takeaways</a:t>
+            </a:r>
+            <a:endParaRPr lang="en-US" sz="2800" dirty="0"/>
+          </a:p>
+        </p:txBody>
+      </p:sp>
+      <p:sp>
+        <p:nvSpPr>
+          <p:cNvPr id="5" name="Text 3"/>
+          <p:cNvSpPr/>
+          <p:nvPr/>
+        </p:nvSpPr>
+        <p:spPr>
+          <a:xfrm>
+            <a:off x="365760" y="1097280"/>
+            <a:ext cx="8412480" cy="3108960"/>
+          </a:xfrm>
+          <a:prstGeom prst="rect">
+            <a:avLst/>
+          </a:prstGeom>
+          <a:noFill/>
+          <a:ln/>
+        </p:spPr>
+        <p:txBody>
+          <a:bodyPr wrap="square" rtlCol="0" anchor="ctr"/>
+          <a:lstStyle/>
+          <a:p>
+            <a:pPr marL="342900" indent="-342900">
+              <a:spcAft>
+                <a:spcPts val="600"/>
+              </a:spcAft>
+              <a:buSzPct val="100000"/>
+              <a:buChar char="•"/>
+            </a:pPr>
+            <a:r>
+              <a:rPr lang="en-US" sz="1500" dirty="0">
+                <a:solidFill>
+                  <a:srgbClr val="212121"/>
+                </a:solidFill>
+                <a:latin typeface="Calibri" pitchFamily="34" charset="0"/>
+                <a:ea typeface="Calibri" pitchFamily="34" charset="-122"/>
+                <a:cs typeface="Calibri" pitchFamily="34" charset="-120"/>
+              </a:rPr>
+              <a:t>Same underlying docs-assistant behavior — three hosting options with Foundry.</a:t>
+            </a:r>
+            <a:endParaRPr lang="en-US" sz="1500" dirty="0"/>
+          </a:p>
+          <a:p>
+            <a:pPr marL="342900" indent="-342900">
+              <a:spcAft>
+                <a:spcPts val="600"/>
+              </a:spcAft>
+              <a:buSzPct val="100000"/>
+              <a:buChar char="•"/>
+            </a:pPr>
+            <a:r>
+              <a:rPr lang="en-US" sz="1500" dirty="0">
+                <a:solidFill>
+                  <a:srgbClr val="212121"/>
+                </a:solidFill>
+                <a:latin typeface="Calibri" pitchFamily="34" charset="0"/>
+                <a:ea typeface="Calibri" pitchFamily="34" charset="-122"/>
+                <a:cs typeface="Calibri" pitchFamily="34" charset="-120"/>
+              </a:rPr>
+              <a:t>Focus on feeling the difference — not just making the code run.</a:t>
+            </a:r>
+            <a:endParaRPr lang="en-US" sz="1500" dirty="0"/>
+          </a:p>
+          <a:p>
+            <a:pPr marL="342900" indent="-342900">
+              <a:spcAft>
+                <a:spcPts val="600"/>
+              </a:spcAft>
+              <a:buSzPct val="100000"/>
+              <a:buChar char="•"/>
+            </a:pPr>
+            <a:r>
+              <a:rPr lang="en-US" sz="1500" dirty="0">
+                <a:solidFill>
+                  <a:srgbClr val="212121"/>
+                </a:solidFill>
+                <a:latin typeface="Calibri" pitchFamily="34" charset="0"/>
+                <a:ea typeface="Calibri" pitchFamily="34" charset="-122"/>
+                <a:cs typeface="Calibri" pitchFamily="34" charset="-120"/>
+              </a:rPr>
+              <a:t>The reflection is the deliverable, not the code.</a:t>
+            </a:r>
+            <a:endParaRPr lang="en-US" sz="1500" dirty="0"/>
+          </a:p>
+          <a:p>
+            <a:pPr marL="342900" indent="-342900">
+              <a:spcAft>
+                <a:spcPts val="600"/>
+              </a:spcAft>
+              <a:buSzPct val="100000"/>
+              <a:buChar char="•"/>
+            </a:pPr>
+            <a:r>
+              <a:rPr lang="en-US" sz="1500" dirty="0">
+                <a:solidFill>
+                  <a:srgbClr val="212121"/>
+                </a:solidFill>
+                <a:latin typeface="Calibri" pitchFamily="34" charset="0"/>
+                <a:ea typeface="Calibri" pitchFamily="34" charset="-122"/>
+                <a:cs typeface="Calibri" pitchFamily="34" charset="-120"/>
+              </a:rPr>
+              <a:t>Start noodling on your capstone scenario this week.</a:t>
+            </a:r>
+            <a:endParaRPr lang="en-US" sz="1500" dirty="0"/>
+          </a:p>
+        </p:txBody>
+      </p:sp>
+      <p:sp>
+        <p:nvSpPr>
+          <p:cNvPr id="6" name="Shape 4"/>
+          <p:cNvSpPr/>
+          <p:nvPr/>
+        </p:nvSpPr>
+        <p:spPr>
+          <a:xfrm>
+            <a:off x="365760" y="4343400"/>
+            <a:ext cx="8412480" cy="457200"/>
+          </a:xfrm>
+          <a:prstGeom prst="rect">
+            <a:avLst/>
+          </a:prstGeom>
+          <a:solidFill>
+            <a:srgbClr val="CADCFC"/>
+          </a:solidFill>
+          <a:ln/>
+        </p:spPr>
+      </p:sp>
+      <p:sp>
+        <p:nvSpPr>
+          <p:cNvPr id="7" name="Text 5"/>
+          <p:cNvSpPr/>
+          <p:nvPr/>
+        </p:nvSpPr>
+        <p:spPr>
+          <a:xfrm>
+            <a:off x="502920" y="4370832"/>
+            <a:ext cx="8138160" cy="402336"/>
+          </a:xfrm>
+          <a:prstGeom prst="rect">
+            <a:avLst/>
+          </a:prstGeom>
+          <a:noFill/>
+          <a:ln/>
+        </p:spPr>
+        <p:txBody>
+          <a:bodyPr wrap="square" lIns="0" tIns="0" rIns="0" bIns="0" rtlCol="0" anchor="ctr"/>
+          <a:lstStyle/>
+          <a:p>
+            <a:pPr indent="0" marL="0">
+              <a:buNone/>
+            </a:pPr>
+            <a:r>
+              <a:rPr lang="en-US" sz="1600" b="1" dirty="0">
+                <a:solidFill>
+                  <a:srgbClr val="1E2761"/>
+                </a:solidFill>
+                <a:latin typeface="Calibri" pitchFamily="34" charset="0"/>
+                <a:ea typeface="Calibri" pitchFamily="34" charset="-122"/>
+                <a:cs typeface="Calibri" pitchFamily="34" charset="-120"/>
+              </a:rPr>
+              <a:t>Next: </a:t>
+            </a:r>
+            <a:pPr indent="0" marL="0">
+              <a:buNone/>
+            </a:pPr>
+            <a:r>
+              <a:rPr lang="en-US" sz="1600" dirty="0">
+                <a:solidFill>
+                  <a:srgbClr val="1E2761"/>
+                </a:solidFill>
+                <a:latin typeface="Calibri" pitchFamily="34" charset="0"/>
+                <a:ea typeface="Calibri" pitchFamily="34" charset="-122"/>
+                <a:cs typeface="Calibri" pitchFamily="34" charset="-120"/>
+              </a:rPr>
+              <a:t>End of Day 1 live content. Have fun with the lab.</a:t>
+            </a:r>
+            <a:endParaRPr lang="en-US" sz="1600" dirty="0"/>
+          </a:p>
+        </p:txBody>
+      </p:sp>
+    </p:spTree>
+  </p:cSld>
+  <p:clrMapOvr>
+    <a:masterClrMapping/>
+  </p:clrMapOvr>
+</p:sld>
+</file>
+
 <file path=ppt/slides/slide2.xml><?xml version="1.0" encoding="utf-8"?>
 <p:sld xmlns:a="http://schemas.openxmlformats.org/drawingml/2006/main" xmlns:r="http://schemas.openxmlformats.org/officeDocument/2006/relationships" xmlns:p="http://schemas.openxmlformats.org/presentationml/2006/main">
   <p:cSld name="Slide 2">
@@ -4066,7 +4479,7 @@
                 <a:ea typeface="Calibri" pitchFamily="34" charset="-122"/>
                 <a:cs typeface="Calibri" pitchFamily="34" charset="-120"/>
               </a:rPr>
-              <a:t>Takeaways</a:t>
+              <a:t>Preview: your capstone project</a:t>
             </a:r>
             <a:endParaRPr lang="en-US" sz="2800" dirty="0"/>
           </a:p>
@@ -4081,7 +4494,124 @@
         <p:spPr>
           <a:xfrm>
             <a:off x="365760" y="1097280"/>
-            <a:ext cx="8412480" cy="3108960"/>
+            <a:ext cx="8412480" cy="548640"/>
+          </a:xfrm>
+          <a:prstGeom prst="rect">
+            <a:avLst/>
+          </a:prstGeom>
+          <a:noFill/>
+          <a:ln/>
+        </p:spPr>
+        <p:txBody>
+          <a:bodyPr wrap="square" rtlCol="0" anchor="ctr"/>
+          <a:lstStyle/>
+          <a:p>
+            <a:pPr indent="0" marL="0">
+              <a:buNone/>
+            </a:pPr>
+            <a:r>
+              <a:rPr lang="en-US" sz="1400" i="1" dirty="0">
+                <a:solidFill>
+                  <a:srgbClr val="212121"/>
+                </a:solidFill>
+                <a:latin typeface="Calibri" pitchFamily="34" charset="0"/>
+                <a:ea typeface="Calibri" pitchFamily="34" charset="-122"/>
+                <a:cs typeface="Calibri" pitchFamily="34" charset="-120"/>
+              </a:rPr>
+              <a:t>The workshop ends with a capstone. Start thinking about your scenario this week — every day gives you a piece.</a:t>
+            </a:r>
+            <a:endParaRPr lang="en-US" sz="1400" dirty="0"/>
+          </a:p>
+        </p:txBody>
+      </p:sp>
+      <p:sp>
+        <p:nvSpPr>
+          <p:cNvPr id="6" name="Text 4"/>
+          <p:cNvSpPr/>
+          <p:nvPr/>
+        </p:nvSpPr>
+        <p:spPr>
+          <a:xfrm>
+            <a:off x="365760" y="1691640"/>
+            <a:ext cx="4069080" cy="365760"/>
+          </a:xfrm>
+          <a:prstGeom prst="rect">
+            <a:avLst/>
+          </a:prstGeom>
+          <a:noFill/>
+          <a:ln/>
+        </p:spPr>
+        <p:txBody>
+          <a:bodyPr wrap="square" lIns="0" tIns="0" rIns="0" bIns="0" rtlCol="0" anchor="ctr"/>
+          <a:lstStyle/>
+          <a:p>
+            <a:pPr indent="0" marL="0">
+              <a:buNone/>
+            </a:pPr>
+            <a:r>
+              <a:rPr lang="en-US" sz="2000" b="1" dirty="0">
+                <a:solidFill>
+                  <a:srgbClr val="1E2761"/>
+                </a:solidFill>
+                <a:latin typeface="Calibri" pitchFamily="34" charset="0"/>
+                <a:ea typeface="Calibri" pitchFamily="34" charset="-122"/>
+                <a:cs typeface="Calibri" pitchFamily="34" charset="-120"/>
+              </a:rPr>
+              <a:t>The format</a:t>
+            </a:r>
+            <a:endParaRPr lang="en-US" sz="2000" dirty="0"/>
+          </a:p>
+        </p:txBody>
+      </p:sp>
+      <p:sp>
+        <p:nvSpPr>
+          <p:cNvPr id="7" name="Text 5"/>
+          <p:cNvSpPr/>
+          <p:nvPr/>
+        </p:nvSpPr>
+        <p:spPr>
+          <a:xfrm>
+            <a:off x="4709160" y="1691640"/>
+            <a:ext cx="4069080" cy="365760"/>
+          </a:xfrm>
+          <a:prstGeom prst="rect">
+            <a:avLst/>
+          </a:prstGeom>
+          <a:noFill/>
+          <a:ln/>
+        </p:spPr>
+        <p:txBody>
+          <a:bodyPr wrap="square" lIns="0" tIns="0" rIns="0" bIns="0" rtlCol="0" anchor="ctr"/>
+          <a:lstStyle/>
+          <a:p>
+            <a:pPr indent="0" marL="0">
+              <a:buNone/>
+            </a:pPr>
+            <a:r>
+              <a:rPr lang="en-US" sz="2000" b="1" dirty="0">
+                <a:solidFill>
+                  <a:srgbClr val="1E2761"/>
+                </a:solidFill>
+                <a:latin typeface="Calibri" pitchFamily="34" charset="0"/>
+                <a:ea typeface="Calibri" pitchFamily="34" charset="-122"/>
+                <a:cs typeface="Calibri" pitchFamily="34" charset="-120"/>
+              </a:rPr>
+              <a:t>Required elements (each day gives you a piece)</a:t>
+            </a:r>
+            <a:endParaRPr lang="en-US" sz="2000" dirty="0"/>
+          </a:p>
+        </p:txBody>
+      </p:sp>
+      <p:sp>
+        <p:nvSpPr>
+          <p:cNvPr id="8" name="Text 6"/>
+          <p:cNvSpPr/>
+          <p:nvPr/>
+        </p:nvSpPr>
+        <p:spPr>
+          <a:xfrm>
+            <a:off x="365760" y="2148840"/>
+            <a:ext cx="4069080" cy="2286000"/>
           </a:xfrm>
           <a:prstGeom prst="rect">
             <a:avLst/>
@@ -4109,7 +4639,7 @@
                 <a:ea typeface="Calibri" pitchFamily="34" charset="-122"/>
                 <a:cs typeface="Calibri" pitchFamily="34" charset="-120"/>
               </a:rPr>
-              <a:t>Same underlying docs-assistant behavior — three hosting options with Foundry.</a:t>
+              <a:t>Solo, or teams of 2–3</a:t>
             </a:r>
             <a:endParaRPr lang="en-US" sz="1500" dirty="0"/>
           </a:p>
@@ -4130,7 +4660,7 @@
                 <a:ea typeface="Calibri" pitchFamily="34" charset="-122"/>
                 <a:cs typeface="Calibri" pitchFamily="34" charset="-120"/>
               </a:rPr>
-              <a:t>Focus on feeling the difference — not just making the code run.</a:t>
+              <a:t>Starts at Day 5 close · target completion 4–6 weeks after</a:t>
             </a:r>
             <a:endParaRPr lang="en-US" sz="1500" dirty="0"/>
           </a:p>
@@ -4151,21 +4681,232 @@
                 <a:ea typeface="Calibri" pitchFamily="34" charset="-122"/>
                 <a:cs typeface="Calibri" pitchFamily="34" charset="-120"/>
               </a:rPr>
-              <a:t>The reflection is the deliverable, not the code.</a:t>
+              <a:t>1:1 architecture review with Jim (± Pradeep)</a:t>
             </a:r>
             <a:endParaRPr lang="en-US" sz="1500" dirty="0"/>
           </a:p>
-        </p:txBody>
-      </p:sp>
-      <p:sp>
-        <p:nvSpPr>
-          <p:cNvPr id="6" name="Shape 4"/>
-          <p:cNvSpPr/>
-          <p:nvPr/>
-        </p:nvSpPr>
-        <p:spPr>
-          <a:xfrm>
-            <a:off x="365760" y="4343400"/>
+          <a:p>
+            <a:pPr marL="342900" indent="-342900">
+              <a:spcAft>
+                <a:spcPts val="600"/>
+              </a:spcAft>
+              <a:buSzPct val="100000"/>
+              <a:buChar char="•"/>
+            </a:pPr>
+            <a:r>
+              <a:rPr lang="en-US" sz="1500" dirty="0">
+                <a:solidFill>
+                  <a:srgbClr val="212121"/>
+                </a:solidFill>
+                <a:latin typeface="Calibri" pitchFamily="34" charset="0"/>
+                <a:ea typeface="Calibri" pitchFamily="34" charset="-122"/>
+                <a:cs typeface="Calibri" pitchFamily="34" charset="-120"/>
+              </a:rPr>
+              <a:t>Coaching and feedback — no competitive scoring</a:t>
+            </a:r>
+            <a:endParaRPr lang="en-US" sz="1500" dirty="0"/>
+          </a:p>
+          <a:p>
+            <a:pPr marL="342900" indent="-342900">
+              <a:spcAft>
+                <a:spcPts val="600"/>
+              </a:spcAft>
+              <a:buSzPct val="100000"/>
+              <a:buChar char="•"/>
+            </a:pPr>
+            <a:r>
+              <a:rPr lang="en-US" sz="1500" dirty="0">
+                <a:solidFill>
+                  <a:srgbClr val="212121"/>
+                </a:solidFill>
+                <a:latin typeface="Calibri" pitchFamily="34" charset="0"/>
+                <a:ea typeface="Calibri" pitchFamily="34" charset="-122"/>
+                <a:cs typeface="Calibri" pitchFamily="34" charset="-120"/>
+              </a:rPr>
+              <a:t>Your choice of scenario</a:t>
+            </a:r>
+            <a:endParaRPr lang="en-US" sz="1500" dirty="0"/>
+          </a:p>
+        </p:txBody>
+      </p:sp>
+      <p:sp>
+        <p:nvSpPr>
+          <p:cNvPr id="9" name="Text 7"/>
+          <p:cNvSpPr/>
+          <p:nvPr/>
+        </p:nvSpPr>
+        <p:spPr>
+          <a:xfrm>
+            <a:off x="4709160" y="2148840"/>
+            <a:ext cx="4069080" cy="2286000"/>
+          </a:xfrm>
+          <a:prstGeom prst="rect">
+            <a:avLst/>
+          </a:prstGeom>
+          <a:noFill/>
+          <a:ln/>
+        </p:spPr>
+        <p:txBody>
+          <a:bodyPr wrap="square" rtlCol="0" anchor="ctr"/>
+          <a:lstStyle/>
+          <a:p>
+            <a:pPr marL="342900" indent="-342900">
+              <a:spcAft>
+                <a:spcPts val="600"/>
+              </a:spcAft>
+              <a:buSzPct val="100000"/>
+              <a:buChar char="•"/>
+            </a:pPr>
+            <a:r>
+              <a:rPr lang="en-US" sz="1500" dirty="0">
+                <a:solidFill>
+                  <a:srgbClr val="212121"/>
+                </a:solidFill>
+                <a:latin typeface="Calibri" pitchFamily="34" charset="0"/>
+                <a:ea typeface="Calibri" pitchFamily="34" charset="-122"/>
+                <a:cs typeface="Calibri" pitchFamily="34" charset="-120"/>
+              </a:rPr>
+              <a:t>An MAF agent (Prompt agent, Hosted agent, or Path C)</a:t>
+            </a:r>
+            <a:endParaRPr lang="en-US" sz="1500" dirty="0"/>
+          </a:p>
+          <a:p>
+            <a:pPr marL="342900" indent="-342900">
+              <a:spcAft>
+                <a:spcPts val="600"/>
+              </a:spcAft>
+              <a:buSzPct val="100000"/>
+              <a:buChar char="•"/>
+            </a:pPr>
+            <a:r>
+              <a:rPr lang="en-US" sz="1500" dirty="0">
+                <a:solidFill>
+                  <a:srgbClr val="212121"/>
+                </a:solidFill>
+                <a:latin typeface="Calibri" pitchFamily="34" charset="0"/>
+                <a:ea typeface="Calibri" pitchFamily="34" charset="-122"/>
+                <a:cs typeface="Calibri" pitchFamily="34" charset="-120"/>
+              </a:rPr>
+              <a:t>Grounded in a Foundry-deployed model</a:t>
+            </a:r>
+            <a:endParaRPr lang="en-US" sz="1500" dirty="0"/>
+          </a:p>
+          <a:p>
+            <a:pPr marL="342900" indent="-342900">
+              <a:spcAft>
+                <a:spcPts val="600"/>
+              </a:spcAft>
+              <a:buSzPct val="100000"/>
+              <a:buChar char="•"/>
+            </a:pPr>
+            <a:r>
+              <a:rPr lang="en-US" sz="1500" dirty="0">
+                <a:solidFill>
+                  <a:srgbClr val="212121"/>
+                </a:solidFill>
+                <a:latin typeface="Calibri" pitchFamily="34" charset="0"/>
+                <a:ea typeface="Calibri" pitchFamily="34" charset="-122"/>
+                <a:cs typeface="Calibri" pitchFamily="34" charset="-120"/>
+              </a:rPr>
+              <a:t>At least one Toolbox tool, MCP server, or function tool</a:t>
+            </a:r>
+            <a:endParaRPr lang="en-US" sz="1500" dirty="0"/>
+          </a:p>
+          <a:p>
+            <a:pPr marL="342900" indent="-342900">
+              <a:spcAft>
+                <a:spcPts val="600"/>
+              </a:spcAft>
+              <a:buSzPct val="100000"/>
+              <a:buChar char="•"/>
+            </a:pPr>
+            <a:r>
+              <a:rPr lang="en-US" sz="1500" dirty="0">
+                <a:solidFill>
+                  <a:srgbClr val="212121"/>
+                </a:solidFill>
+                <a:latin typeface="Calibri" pitchFamily="34" charset="0"/>
+                <a:ea typeface="Calibri" pitchFamily="34" charset="-122"/>
+                <a:cs typeface="Calibri" pitchFamily="34" charset="-120"/>
+              </a:rPr>
+              <a:t>At least one Foundry IQ source or custom RAG</a:t>
+            </a:r>
+            <a:endParaRPr lang="en-US" sz="1500" dirty="0"/>
+          </a:p>
+          <a:p>
+            <a:pPr marL="342900" indent="-342900">
+              <a:spcAft>
+                <a:spcPts val="600"/>
+              </a:spcAft>
+              <a:buSzPct val="100000"/>
+              <a:buChar char="•"/>
+            </a:pPr>
+            <a:r>
+              <a:rPr lang="en-US" sz="1500" dirty="0">
+                <a:solidFill>
+                  <a:srgbClr val="212121"/>
+                </a:solidFill>
+                <a:latin typeface="Calibri" pitchFamily="34" charset="0"/>
+                <a:ea typeface="Calibri" pitchFamily="34" charset="-122"/>
+                <a:cs typeface="Calibri" pitchFamily="34" charset="-120"/>
+              </a:rPr>
+              <a:t>A golden set of ≥10 items + captured eval score</a:t>
+            </a:r>
+            <a:endParaRPr lang="en-US" sz="1500" dirty="0"/>
+          </a:p>
+          <a:p>
+            <a:pPr marL="342900" indent="-342900">
+              <a:spcAft>
+                <a:spcPts val="600"/>
+              </a:spcAft>
+              <a:buSzPct val="100000"/>
+              <a:buChar char="•"/>
+            </a:pPr>
+            <a:r>
+              <a:rPr lang="en-US" sz="1500" dirty="0">
+                <a:solidFill>
+                  <a:srgbClr val="212121"/>
+                </a:solidFill>
+                <a:latin typeface="Calibri" pitchFamily="34" charset="0"/>
+                <a:ea typeface="Calibri" pitchFamily="34" charset="-122"/>
+                <a:cs typeface="Calibri" pitchFamily="34" charset="-120"/>
+              </a:rPr>
+              <a:t>OTel traces visible in the portal or App Insights</a:t>
+            </a:r>
+            <a:endParaRPr lang="en-US" sz="1500" dirty="0"/>
+          </a:p>
+          <a:p>
+            <a:pPr marL="342900" indent="-342900">
+              <a:spcAft>
+                <a:spcPts val="600"/>
+              </a:spcAft>
+              <a:buSzPct val="100000"/>
+              <a:buChar char="•"/>
+            </a:pPr>
+            <a:r>
+              <a:rPr lang="en-US" sz="1500" dirty="0">
+                <a:solidFill>
+                  <a:srgbClr val="212121"/>
+                </a:solidFill>
+                <a:latin typeface="Calibri" pitchFamily="34" charset="0"/>
+                <a:ea typeface="Calibri" pitchFamily="34" charset="-122"/>
+                <a:cs typeface="Calibri" pitchFamily="34" charset="-120"/>
+              </a:rPr>
+              <a:t>Architecture diagram + README with 30-day next steps</a:t>
+            </a:r>
+            <a:endParaRPr lang="en-US" sz="1500" dirty="0"/>
+          </a:p>
+        </p:txBody>
+      </p:sp>
+      <p:sp>
+        <p:nvSpPr>
+          <p:cNvPr id="10" name="Shape 8"/>
+          <p:cNvSpPr/>
+          <p:nvPr/>
+        </p:nvSpPr>
+        <p:spPr>
+          <a:xfrm>
+            <a:off x="365760" y="4526280"/>
             <a:ext cx="8412480" cy="457200"/>
           </a:xfrm>
           <a:prstGeom prst="rect">
@@ -4179,13 +4920,13 @@
       </p:sp>
       <p:sp>
         <p:nvSpPr>
-          <p:cNvPr id="7" name="Text 5"/>
-          <p:cNvSpPr/>
-          <p:nvPr/>
-        </p:nvSpPr>
-        <p:spPr>
-          <a:xfrm>
-            <a:off x="502920" y="4370832"/>
+          <p:cNvPr id="11" name="Text 9"/>
+          <p:cNvSpPr/>
+          <p:nvPr/>
+        </p:nvSpPr>
+        <p:spPr>
+          <a:xfrm>
+            <a:off x="502920" y="4553712"/>
             <a:ext cx="8138160" cy="402336"/>
           </a:xfrm>
           <a:prstGeom prst="rect">
@@ -4202,7 +4943,7 @@
               <a:buNone/>
             </a:pPr>
             <a:r>
-              <a:rPr lang="en-US" sz="1600" b="1" dirty="0">
+              <a:rPr lang="en-US" sz="1200" b="1" dirty="0">
                 <a:solidFill>
                   <a:srgbClr val="1E2761"/>
                 </a:solidFill>
@@ -4210,13 +4951,13 @@
                 <a:ea typeface="Calibri" pitchFamily="34" charset="-122"/>
                 <a:cs typeface="Calibri" pitchFamily="34" charset="-120"/>
               </a:rPr>
-              <a:t>Next: </a:t>
+              <a:t>Start today: </a:t>
             </a:r>
             <a:pPr indent="0" marL="0">
               <a:buNone/>
             </a:pPr>
             <a:r>
-              <a:rPr lang="en-US" sz="1600" dirty="0">
+              <a:rPr lang="en-US" sz="1200" dirty="0">
                 <a:solidFill>
                   <a:srgbClr val="1E2761"/>
                 </a:solidFill>
@@ -4224,9 +4965,9 @@
                 <a:ea typeface="Calibri" pitchFamily="34" charset="-122"/>
                 <a:cs typeface="Calibri" pitchFamily="34" charset="-120"/>
               </a:rPr>
-              <a:t>End of Day 1 live content. Have fun with the lab.</a:t>
-            </a:r>
-            <a:endParaRPr lang="en-US" sz="1600" dirty="0"/>
+              <a:t>reflection question #4 asks what you'd want to build next — that's your capstone starter.</a:t>
+            </a:r>
+            <a:endParaRPr lang="en-US" sz="1200" dirty="0"/>
           </a:p>
         </p:txBody>
       </p:sp>

--- a/decks/day1/module-7-lab-kickoff.pptx
+++ b/decks/day1/module-7-lab-kickoff.pptx
@@ -2589,7 +2589,7 @@
         <p:spPr>
           <a:xfrm>
             <a:off x="365760" y="1097280"/>
-            <a:ext cx="8412480" cy="1737360"/>
+            <a:ext cx="8412480" cy="2011680"/>
           </a:xfrm>
           <a:prstGeom prst="rect">
             <a:avLst/>
@@ -2614,7 +2614,7 @@
         <p:spPr>
           <a:xfrm>
             <a:off x="502920" y="1188720"/>
-            <a:ext cx="8138160" cy="1554480"/>
+            <a:ext cx="8138160" cy="1828800"/>
           </a:xfrm>
           <a:prstGeom prst="rect">
             <a:avLst/>
@@ -2656,6 +2656,23 @@
                 <a:cs typeface="Consolas" pitchFamily="34" charset="-120"/>
               </a:rPr>
               <a:t>az account show --query name -o tsv</a:t>
+            </a:r>
+            <a:endParaRPr lang="en-US" sz="1300" dirty="0"/>
+          </a:p>
+          <a:p>
+            <a:pPr indent="0" marL="0">
+              <a:buNone/>
+            </a:pPr>
+            <a:r>
+              <a:rPr lang="en-US" sz="1300" dirty="0">
+                <a:solidFill>
+                  <a:srgbClr val="212121"/>
+                </a:solidFill>
+                <a:latin typeface="Consolas" pitchFamily="34" charset="0"/>
+                <a:ea typeface="Consolas" pitchFamily="34" charset="-122"/>
+                <a:cs typeface="Consolas" pitchFamily="34" charset="-120"/>
+              </a:rPr>
+              <a:t>azd version              # Azure Developer CLI (used from Day 3 onward)</a:t>
             </a:r>
             <a:endParaRPr lang="en-US" sz="1300" dirty="0"/>
           </a:p>

--- a/decks/day1/module-7-lab-kickoff.pptx
+++ b/decks/day1/module-7-lab-kickoff.pptx
@@ -1344,10 +1344,13 @@
             <a:r>
               <a:rPr lang="en-US" dirty="0"/>
               <a:t>• Plant the seed on Day 1 — attendees have all week to marinate on scenarios
-• Emphasize: solo OR small teams of 2–3, their choice
-• Timing: capstone runs ~4–6 weeks after workshop close
-• Cohort 1 target: reviews complete by end of Nov 2026 (before blackout)
-• 1:1 review is coaching, not scoring — reassure any nervous attendees
+• Everyone on a team of 2–3 — no solo path this time
+• Timeline: 2–3 weeks between Day 5 close and demo day
+• Cohort 1: workshop ends wk of Oct 12; demo day lands wk of Nov 2 or Nov 9
+• Format: shared demo day, not 1:1 reviews
+•   ~15 min per team (10 demo + 5 Q&amp;A / coaching)
+•   Pradeep + Jim attend; attendees also see each other's work
+• Character stays coaching + feedback — no ranking, no scoring
 • Every required element maps to a day of the workshop:
 •   MAF agent → Day 1
 •   Grounding + tools → Day 2
@@ -1355,7 +1358,7 @@
 •   Multi-agent + eval → Day 4
 •   Observability + deployment → Day 5
 • Point out reflection question 4 explicitly — it's the seed
-• Ask attendees to jot down 2–3 scenario ideas by end of the week</a:t>
+• Ask attendees to jot down 2–3 scenario ideas + potential teammates by end of the week</a:t>
             </a:r>
             <a:endParaRPr lang="en-US" dirty="0"/>
           </a:p>
@@ -4535,7 +4538,7 @@
                 <a:ea typeface="Calibri" pitchFamily="34" charset="-122"/>
                 <a:cs typeface="Calibri" pitchFamily="34" charset="-120"/>
               </a:rPr>
-              <a:t>The workshop ends with a capstone. Start thinking about your scenario this week — every day gives you a piece.</a:t>
+              <a:t>The workshop ends with a team capstone. Start thinking about your scenario this week — every day gives you a piece.</a:t>
             </a:r>
             <a:endParaRPr lang="en-US" sz="1400" dirty="0"/>
           </a:p>
@@ -4656,7 +4659,7 @@
                 <a:ea typeface="Calibri" pitchFamily="34" charset="-122"/>
                 <a:cs typeface="Calibri" pitchFamily="34" charset="-120"/>
               </a:rPr>
-              <a:t>Solo, or teams of 2–3</a:t>
+              <a:t>Teams of 2–3 · everyone participates</a:t>
             </a:r>
             <a:endParaRPr lang="en-US" sz="1500" dirty="0"/>
           </a:p>
@@ -4677,7 +4680,7 @@
                 <a:ea typeface="Calibri" pitchFamily="34" charset="-122"/>
                 <a:cs typeface="Calibri" pitchFamily="34" charset="-120"/>
               </a:rPr>
-              <a:t>Starts at Day 5 close · target completion 4–6 weeks after</a:t>
+              <a:t>Starts at Day 5 close · demo day 2–3 weeks after</a:t>
             </a:r>
             <a:endParaRPr lang="en-US" sz="1500" dirty="0"/>
           </a:p>
@@ -4698,7 +4701,7 @@
                 <a:ea typeface="Calibri" pitchFamily="34" charset="-122"/>
                 <a:cs typeface="Calibri" pitchFamily="34" charset="-120"/>
               </a:rPr>
-              <a:t>1:1 architecture review with Jim (± Pradeep)</a:t>
+              <a:t>Shared demo day — all teams present to Pradeep + Jim</a:t>
             </a:r>
             <a:endParaRPr lang="en-US" sz="1500" dirty="0"/>
           </a:p>
@@ -4719,7 +4722,7 @@
                 <a:ea typeface="Calibri" pitchFamily="34" charset="-122"/>
                 <a:cs typeface="Calibri" pitchFamily="34" charset="-120"/>
               </a:rPr>
-              <a:t>Coaching and feedback — no competitive scoring</a:t>
+              <a:t>~15 min per team (10 demo + 5 Q&amp;A + coaching)</a:t>
             </a:r>
             <a:endParaRPr lang="en-US" sz="1500" dirty="0"/>
           </a:p>
@@ -4740,32 +4743,10 @@
                 <a:ea typeface="Calibri" pitchFamily="34" charset="-122"/>
                 <a:cs typeface="Calibri" pitchFamily="34" charset="-120"/>
               </a:rPr>
-              <a:t>Your choice of scenario</a:t>
+              <a:t>Coaching and feedback — no competitive scoring</a:t>
             </a:r>
             <a:endParaRPr lang="en-US" sz="1500" dirty="0"/>
           </a:p>
-        </p:txBody>
-      </p:sp>
-      <p:sp>
-        <p:nvSpPr>
-          <p:cNvPr id="9" name="Text 7"/>
-          <p:cNvSpPr/>
-          <p:nvPr/>
-        </p:nvSpPr>
-        <p:spPr>
-          <a:xfrm>
-            <a:off x="4709160" y="2148840"/>
-            <a:ext cx="4069080" cy="2286000"/>
-          </a:xfrm>
-          <a:prstGeom prst="rect">
-            <a:avLst/>
-          </a:prstGeom>
-          <a:noFill/>
-          <a:ln/>
-        </p:spPr>
-        <p:txBody>
-          <a:bodyPr wrap="square" rtlCol="0" anchor="ctr"/>
-          <a:lstStyle/>
           <a:p>
             <a:pPr marL="342900" indent="-342900">
               <a:spcAft>
@@ -4783,10 +4764,32 @@
                 <a:ea typeface="Calibri" pitchFamily="34" charset="-122"/>
                 <a:cs typeface="Calibri" pitchFamily="34" charset="-120"/>
               </a:rPr>
-              <a:t>An MAF agent (Prompt agent, Hosted agent, or Path C)</a:t>
+              <a:t>Your team's choice of scenario</a:t>
             </a:r>
             <a:endParaRPr lang="en-US" sz="1500" dirty="0"/>
           </a:p>
+        </p:txBody>
+      </p:sp>
+      <p:sp>
+        <p:nvSpPr>
+          <p:cNvPr id="9" name="Text 7"/>
+          <p:cNvSpPr/>
+          <p:nvPr/>
+        </p:nvSpPr>
+        <p:spPr>
+          <a:xfrm>
+            <a:off x="4709160" y="2148840"/>
+            <a:ext cx="4069080" cy="2286000"/>
+          </a:xfrm>
+          <a:prstGeom prst="rect">
+            <a:avLst/>
+          </a:prstGeom>
+          <a:noFill/>
+          <a:ln/>
+        </p:spPr>
+        <p:txBody>
+          <a:bodyPr wrap="square" rtlCol="0" anchor="ctr"/>
+          <a:lstStyle/>
           <a:p>
             <a:pPr marL="342900" indent="-342900">
               <a:spcAft>
@@ -4804,7 +4807,7 @@
                 <a:ea typeface="Calibri" pitchFamily="34" charset="-122"/>
                 <a:cs typeface="Calibri" pitchFamily="34" charset="-120"/>
               </a:rPr>
-              <a:t>Grounded in a Foundry-deployed model</a:t>
+              <a:t>An MAF agent (Prompt agent, Hosted agent, or Path C)</a:t>
             </a:r>
             <a:endParaRPr lang="en-US" sz="1500" dirty="0"/>
           </a:p>
@@ -4825,7 +4828,7 @@
                 <a:ea typeface="Calibri" pitchFamily="34" charset="-122"/>
                 <a:cs typeface="Calibri" pitchFamily="34" charset="-120"/>
               </a:rPr>
-              <a:t>At least one Toolbox tool, MCP server, or function tool</a:t>
+              <a:t>Grounded in a Foundry-deployed model</a:t>
             </a:r>
             <a:endParaRPr lang="en-US" sz="1500" dirty="0"/>
           </a:p>
@@ -4846,7 +4849,7 @@
                 <a:ea typeface="Calibri" pitchFamily="34" charset="-122"/>
                 <a:cs typeface="Calibri" pitchFamily="34" charset="-120"/>
               </a:rPr>
-              <a:t>At least one Foundry IQ source or custom RAG</a:t>
+              <a:t>At least one Toolbox tool, MCP server, or function tool</a:t>
             </a:r>
             <a:endParaRPr lang="en-US" sz="1500" dirty="0"/>
           </a:p>
@@ -4867,7 +4870,7 @@
                 <a:ea typeface="Calibri" pitchFamily="34" charset="-122"/>
                 <a:cs typeface="Calibri" pitchFamily="34" charset="-120"/>
               </a:rPr>
-              <a:t>A golden set of ≥10 items + captured eval score</a:t>
+              <a:t>At least one Foundry IQ source or custom RAG</a:t>
             </a:r>
             <a:endParaRPr lang="en-US" sz="1500" dirty="0"/>
           </a:p>
@@ -4888,7 +4891,7 @@
                 <a:ea typeface="Calibri" pitchFamily="34" charset="-122"/>
                 <a:cs typeface="Calibri" pitchFamily="34" charset="-120"/>
               </a:rPr>
-              <a:t>OTel traces visible in the portal or App Insights</a:t>
+              <a:t>A golden set of ≥10 items + captured eval score</a:t>
             </a:r>
             <a:endParaRPr lang="en-US" sz="1500" dirty="0"/>
           </a:p>
@@ -4909,6 +4912,27 @@
                 <a:ea typeface="Calibri" pitchFamily="34" charset="-122"/>
                 <a:cs typeface="Calibri" pitchFamily="34" charset="-120"/>
               </a:rPr>
+              <a:t>OTel traces visible in the portal or App Insights</a:t>
+            </a:r>
+            <a:endParaRPr lang="en-US" sz="1500" dirty="0"/>
+          </a:p>
+          <a:p>
+            <a:pPr marL="342900" indent="-342900">
+              <a:spcAft>
+                <a:spcPts val="600"/>
+              </a:spcAft>
+              <a:buSzPct val="100000"/>
+              <a:buChar char="•"/>
+            </a:pPr>
+            <a:r>
+              <a:rPr lang="en-US" sz="1500" dirty="0">
+                <a:solidFill>
+                  <a:srgbClr val="212121"/>
+                </a:solidFill>
+                <a:latin typeface="Calibri" pitchFamily="34" charset="0"/>
+                <a:ea typeface="Calibri" pitchFamily="34" charset="-122"/>
+                <a:cs typeface="Calibri" pitchFamily="34" charset="-120"/>
+              </a:rPr>
               <a:t>Architecture diagram + README with 30-day next steps</a:t>
             </a:r>
             <a:endParaRPr lang="en-US" sz="1500" dirty="0"/>
@@ -4982,7 +5006,7 @@
                 <a:ea typeface="Calibri" pitchFamily="34" charset="-122"/>
                 <a:cs typeface="Calibri" pitchFamily="34" charset="-120"/>
               </a:rPr>
-              <a:t>reflection question #4 asks what you'd want to build next — that's your capstone starter.</a:t>
+              <a:t>reflection question #4 asks what scenario your team would build — that's your capstone starter.</a:t>
             </a:r>
             <a:endParaRPr lang="en-US" sz="1200" dirty="0"/>
           </a:p>

--- a/decks/day1/module-7-lab-kickoff.pptx
+++ b/decks/day1/module-7-lab-kickoff.pptx
@@ -975,7 +975,7 @@
 • Four questions to answer:
 •   1. Which path felt fastest to iterate on and why?
 •   2. What does Foundry manage in A/B that you'd handle in C?
-•   3. For a Publix scenario you know, which path would you pick?
+•   3. For a scenario you know, which path would you pick?
 •   4. What would you want to try next?
 • Attendee who completes Parts A + C with good reflection &gt; attendee who completes all 3 with none</a:t>
             </a:r>
@@ -1068,7 +1068,7 @@
               <a:t>• Set the norm: asking questions is encouraged, not embarrassing
 • First-hour blocker rate matters more than final completion rate
 • Channels: workshop chat for blockers, pair programming for stuck code
-• Facilitator is on during async time; response times vary
+• Instructor is on during async time; response times vary
 • If stuck &gt; 20 min on the same thing, ping the channel</a:t>
             </a:r>
             <a:endParaRPr lang="en-US" dirty="0"/>
@@ -1346,7 +1346,7 @@
               <a:t>• Plant the seed on Day 1 — attendees have all week to marinate on scenarios
 • Everyone on a team of 2–3 — no solo path this time
 • Timeline: 2–3 weeks between Day 5 close and demo day
-• Cohort 1: workshop ends wk of Oct 12; demo day lands wk of Nov 2 or Nov 9
+• Workshop timing: workshop ends wk of Oct 12; demo day lands wk of Nov 2 or Nov 9
 • Format: shared demo day, not 1:1 reviews
 •   ~15 min per team (10 demo + 5 Q&amp;A / coaching)
 •   Pradeep + Jim attend; attendees also see each other's work
@@ -3601,7 +3601,7 @@
                 <a:ea typeface="Calibri" pitchFamily="34" charset="-122"/>
                 <a:cs typeface="Calibri" pitchFamily="34" charset="-120"/>
               </a:rPr>
-              <a:t>Which would you pick for a shared cross-team agent at Publix? Why?</a:t>
+              <a:t>Which would you pick for a shared cross-team production agent? Why?</a:t>
             </a:r>
             <a:endParaRPr lang="en-US" sz="1500" dirty="0"/>
           </a:p>
@@ -4369,7 +4369,7 @@
                 <a:ea typeface="Calibri" pitchFamily="34" charset="-122"/>
                 <a:cs typeface="Calibri" pitchFamily="34" charset="-120"/>
               </a:rPr>
-              <a:t>Going long? Ping a facilitator — we'll help you scope down.</a:t>
+              <a:t>Going long? Ping a instructor — we'll help you scope down.</a:t>
             </a:r>
             <a:endParaRPr lang="en-US" sz="1400" dirty="0"/>
           </a:p>

--- a/decks/day1/module-7-lab-kickoff.pptx
+++ b/decks/day1/module-7-lab-kickoff.pptx
@@ -2405,7 +2405,7 @@
                 <a:ea typeface="Calibri" pitchFamily="34" charset="-122"/>
                 <a:cs typeface="Calibri" pitchFamily="34" charset="-120"/>
               </a:rPr>
-              <a:t>Part B — Hosted agent (connect to a pre-deployed one; explore what Foundry manages)</a:t>
+              <a:t>Part B — Hosted agent (deploy your own with azd; explore what Foundry manages)</a:t>
             </a:r>
             <a:endParaRPr lang="en-US" sz="1500" dirty="0"/>
           </a:p>
@@ -3496,7 +3496,7 @@
                 <a:ea typeface="Calibri" pitchFamily="34" charset="-122"/>
                 <a:cs typeface="Calibri" pitchFamily="34" charset="-120"/>
               </a:rPr>
-              <a:t>Part B runs — you connect to a pre-deployed Hosted agent and walk the portal to see what Foundry manages</a:t>
+              <a:t>Part B runs — you deploy your own Hosted agent with azd and walk the portal to see what Foundry manages</a:t>
             </a:r>
             <a:endParaRPr lang="en-US" sz="1500" dirty="0"/>
           </a:p>
@@ -4267,7 +4267,7 @@
                 <a:ea typeface="Calibri" pitchFamily="34" charset="-122"/>
                 <a:cs typeface="Calibri" pitchFamily="34" charset="-120"/>
               </a:rPr>
-              <a:t>Part B → about 30 min (connect + portal exploration)</a:t>
+              <a:t>Part B → about 45 min (deploy your own Hosted agent via azd + connect + portal exploration)</a:t>
             </a:r>
             <a:endParaRPr lang="en-US" sz="1500" dirty="0"/>
           </a:p>

--- a/decks/day1/module-7-lab-kickoff.pptx
+++ b/decks/day1/module-7-lab-kickoff.pptx
@@ -2790,7 +2790,7 @@
                 <a:ea typeface="Calibri" pitchFamily="34" charset="-122"/>
                 <a:cs typeface="Calibri" pitchFamily="34" charset="-120"/>
               </a:rPr>
-              <a:t>A model deployment name in that project (e.g., gpt-4o or gpt-5.4-mini)</a:t>
+              <a:t>A model deployment name in that project (recommended: gpt-5.4-mini)</a:t>
             </a:r>
             <a:endParaRPr lang="en-US" sz="1500" dirty="0"/>
           </a:p>

--- a/decks/day1/module-7-lab-kickoff.pptx
+++ b/decks/day1/module-7-lab-kickoff.pptx
@@ -2790,7 +2790,7 @@
                 <a:ea typeface="Calibri" pitchFamily="34" charset="-122"/>
                 <a:cs typeface="Calibri" pitchFamily="34" charset="-120"/>
               </a:rPr>
-              <a:t>A model deployment name in that project (recommended: gpt-5.4-mini)</a:t>
+              <a:t>A model deployment name in that project (recommended: gpt-5.6-luna)</a:t>
             </a:r>
             <a:endParaRPr lang="en-US" sz="1500" dirty="0"/>
           </a:p>

--- a/decks/day1/module-7-lab-kickoff.pptx
+++ b/decks/day1/module-7-lab-kickoff.pptx
@@ -603,7 +603,7 @@
             <a:r>
               <a:rPr lang="en-US" dirty="0"/>
               <a:t>• Sign-off · Day 1 wrap
-• Encourage attendees to start the lab in a small pair or group if async time doesn't line up individually
+• Encourage attendees to start the lab in a small pair or group if lab time doesn't line up individually
 • Reinforce the capstone seed one more time
 • Confirm no vocabulary confusion (Prompt agent / Hosted agent / Path C) before releasing</a:t>
             </a:r>
@@ -789,7 +789,7 @@
 • Ask: 'raise your hand if az login didn't work'
 • Ask: 'raise your hand if python --version doesn't show 3.11+'
 • Ask: 'raise your hand if you don't have your project endpoint yet'
-• Fix issues in real time — do NOT let them accumulate to async time
+• Fix issues in real time — do NOT let them accumulate to the lab
 • If more than 20% of attendees are stuck, delay the lab kickoff</a:t>
             </a:r>
             <a:endParaRPr lang="en-US" dirty="0"/>
@@ -1068,7 +1068,7 @@
               <a:t>• Set the norm: asking questions is encouraged, not embarrassing
 • First-hour blocker rate matters more than final completion rate
 • Channels: workshop chat for blockers, pair programming for stuck code
-• Instructor is on during async time; response times vary
+• Instructor is on during the lab
 • If stuck &gt; 20 min on the same thing, ping the channel</a:t>
             </a:r>
             <a:endParaRPr lang="en-US" dirty="0"/>
@@ -1157,12 +1157,13 @@
           <a:p>
             <a:r>
               <a:rPr lang="en-US" dirty="0"/>
-              <a:t>• Look-before-you-leap slide — this saves you 15 identical questions later
+              <a:t>• GROUNDING FIX 2026-08-19: role is 'Foundry User' (not old 'Azure AI User'); scope is the RESOURCE (not the project)
+• Look-before-you-leap slide — this saves you 15 identical questions later
 • Walk through the 4 gotchas quickly
-• az login OK but 401 → Foundry User role missing at resource scope
+• az login OK but 401 → Foundry User role at Foundry resource scope (portal IAM on the resource)
 • FOUNDRY_PROJECT_ENDPOINT not found → copy from .env.example
 • Model deployment name mismatch → not the same as the model name
-• Python packages missing → uv sync from labs/day1/python/</a:t>
+• Python packages missing → uv sync from labs/day1/python/ — NOT pip install</a:t>
             </a:r>
             <a:endParaRPr lang="en-US" dirty="0"/>
           </a:p>
@@ -1253,7 +1254,7 @@
               <a:t>• Set realistic expectations before they start
 • Part A: ~30 min · Part B: ~30 min · Part C: ~45 min
 • Reflection commit: ~10 min
-• Total: ~2 hours of async work
+• Total: ~2 hours of lab work
 • Attendees who hit 90 min on Part C should ping the channel
 • Going long often means an env or RBAC issue, not a code issue</a:t>
             </a:r>
@@ -2447,7 +2448,7 @@
                 <a:ea typeface="Calibri" pitchFamily="34" charset="-122"/>
                 <a:cs typeface="Calibri" pitchFamily="34" charset="-120"/>
               </a:rPr>
-              <a:t>Ask each the same questions and compare behavior, latency, and where thread state lives</a:t>
+              <a:t>Ask each the same questions and compare behavior, latency, and where session state lives</a:t>
             </a:r>
             <a:endParaRPr lang="en-US" sz="1500" dirty="0"/>
           </a:p>
@@ -2709,23 +2710,6 @@
                 <a:ea typeface="Consolas" pitchFamily="34" charset="-122"/>
                 <a:cs typeface="Consolas" pitchFamily="34" charset="-120"/>
               </a:rPr>
-              <a:t>dotnet --version         # 10.0+ (optional, if doing C#)</a:t>
-            </a:r>
-            <a:endParaRPr lang="en-US" sz="1300" dirty="0"/>
-          </a:p>
-          <a:p>
-            <a:pPr indent="0" marL="0">
-              <a:buNone/>
-            </a:pPr>
-            <a:r>
-              <a:rPr lang="en-US" sz="1300" dirty="0">
-                <a:solidFill>
-                  <a:srgbClr val="212121"/>
-                </a:solidFill>
-                <a:latin typeface="Consolas" pitchFamily="34" charset="0"/>
-                <a:ea typeface="Consolas" pitchFamily="34" charset="-122"/>
-                <a:cs typeface="Consolas" pitchFamily="34" charset="-120"/>
-              </a:rPr>
               <a:t>uv --version             # required for Python labs</a:t>
             </a:r>
             <a:endParaRPr lang="en-US" sz="1300" dirty="0"/>
@@ -2829,7 +2813,7 @@
                 <a:ea typeface="Calibri" pitchFamily="34" charset="-122"/>
                 <a:cs typeface="Calibri" pitchFamily="34" charset="-120"/>
               </a:rPr>
-              <a:t>If anything fails, flag it now — get unblocked before the async portion.</a:t>
+              <a:t>If anything fails, flag it now — get unblocked before the lab.</a:t>
             </a:r>
             <a:endParaRPr lang="en-US" sz="1400" dirty="0"/>
           </a:p>
@@ -3217,7 +3201,7 @@
                 <a:ea typeface="Consolas" pitchFamily="34" charset="-122"/>
                 <a:cs typeface="Consolas" pitchFamily="34" charset="-120"/>
               </a:rPr>
-              <a:t>├── python/                   ← Python starter templates (uv)</a:t>
+              <a:t>└── python/                   ← Python starter templates (uv)</a:t>
             </a:r>
             <a:endParaRPr lang="en-US" sz="1200" dirty="0"/>
           </a:p>
@@ -3234,7 +3218,7 @@
                 <a:ea typeface="Consolas" pitchFamily="34" charset="-122"/>
                 <a:cs typeface="Consolas" pitchFamily="34" charset="-120"/>
               </a:rPr>
-              <a:t>│   ├── pyproject.toml</a:t>
+              <a:t>    ├── pyproject.toml</a:t>
             </a:r>
             <a:endParaRPr lang="en-US" sz="1200" dirty="0"/>
           </a:p>
@@ -3251,7 +3235,7 @@
                 <a:ea typeface="Consolas" pitchFamily="34" charset="-122"/>
                 <a:cs typeface="Consolas" pitchFamily="34" charset="-120"/>
               </a:rPr>
-              <a:t>│   ├── part_a_prompt_agent.py</a:t>
+              <a:t>    ├── part_a_prompt_agent.py</a:t>
             </a:r>
             <a:endParaRPr lang="en-US" sz="1200" dirty="0"/>
           </a:p>
@@ -3268,7 +3252,7 @@
                 <a:ea typeface="Consolas" pitchFamily="34" charset="-122"/>
                 <a:cs typeface="Consolas" pitchFamily="34" charset="-120"/>
               </a:rPr>
-              <a:t>│   ├── part_b_hosted_agent.py</a:t>
+              <a:t>    ├── part_b_hosted_agent.py</a:t>
             </a:r>
             <a:endParaRPr lang="en-US" sz="1200" dirty="0"/>
           </a:p>
@@ -3285,24 +3269,7 @@
                 <a:ea typeface="Consolas" pitchFamily="34" charset="-122"/>
                 <a:cs typeface="Consolas" pitchFamily="34" charset="-120"/>
               </a:rPr>
-              <a:t>│   └── part_c_responses_api.py</a:t>
-            </a:r>
-            <a:endParaRPr lang="en-US" sz="1200" dirty="0"/>
-          </a:p>
-          <a:p>
-            <a:pPr indent="0" marL="0">
-              <a:buNone/>
-            </a:pPr>
-            <a:r>
-              <a:rPr lang="en-US" sz="1200" dirty="0">
-                <a:solidFill>
-                  <a:srgbClr val="212121"/>
-                </a:solidFill>
-                <a:latin typeface="Consolas" pitchFamily="34" charset="0"/>
-                <a:ea typeface="Consolas" pitchFamily="34" charset="-122"/>
-                <a:cs typeface="Consolas" pitchFamily="34" charset="-120"/>
-              </a:rPr>
-              <a:t>└── csharp/PartC_ResponsesApi/</a:t>
+              <a:t>    └── part_c_responses_api.py</a:t>
             </a:r>
             <a:endParaRPr lang="en-US" sz="1200" dirty="0"/>
           </a:p>
@@ -3837,7 +3804,7 @@
                 <a:ea typeface="Calibri" pitchFamily="34" charset="-122"/>
                 <a:cs typeface="Calibri" pitchFamily="34" charset="-120"/>
               </a:rPr>
-              <a:t>Instructor is on for questions during the async portion; response times vary</a:t>
+              <a:t>Instructor is on for questions during the lab</a:t>
             </a:r>
             <a:endParaRPr lang="en-US" sz="1500" dirty="0"/>
           </a:p>
@@ -4010,7 +3977,7 @@
                 <a:ea typeface="Calibri" pitchFamily="34" charset="-122"/>
                 <a:cs typeface="Calibri" pitchFamily="34" charset="-120"/>
               </a:rPr>
-              <a:t>az login succeeded but MAF still 401s — may need Azure AI User role on the project</a:t>
+              <a:t>az login succeeded but MAF still 401s — need the Foundry User role on the Foundry RESOURCE (not the project). Fix in Access Control (IAM) on the resource.</a:t>
             </a:r>
             <a:endParaRPr lang="en-US" sz="1400" dirty="0"/>
           </a:p>
@@ -4073,7 +4040,7 @@
                 <a:ea typeface="Calibri" pitchFamily="34" charset="-122"/>
                 <a:cs typeface="Calibri" pitchFamily="34" charset="-120"/>
               </a:rPr>
-              <a:t>Python — package missing — uv sync from labs/day1/python/</a:t>
+              <a:t>Python — package missing — run uv sync from labs/day1/python/ (do not use pip install)</a:t>
             </a:r>
             <a:endParaRPr lang="en-US" sz="1400" dirty="0"/>
           </a:p>
@@ -4330,7 +4297,7 @@
                 <a:ea typeface="Calibri" pitchFamily="34" charset="-122"/>
                 <a:cs typeface="Calibri" pitchFamily="34" charset="-120"/>
               </a:rPr>
-              <a:t>Total: ~2 hours of async work</a:t>
+              <a:t>Total: ~2 hours of lab work</a:t>
             </a:r>
             <a:endParaRPr lang="en-US" sz="1500" dirty="0"/>
           </a:p>
@@ -4369,7 +4336,7 @@
                 <a:ea typeface="Calibri" pitchFamily="34" charset="-122"/>
                 <a:cs typeface="Calibri" pitchFamily="34" charset="-120"/>
               </a:rPr>
-              <a:t>Going long? Ping a instructor — we'll help you scope down.</a:t>
+              <a:t>Going long? Ping an instructor — we'll help you scope down.</a:t>
             </a:r>
             <a:endParaRPr lang="en-US" sz="1400" dirty="0"/>
           </a:p>
@@ -4514,7 +4481,7 @@
         <p:spPr>
           <a:xfrm>
             <a:off x="365760" y="1097280"/>
-            <a:ext cx="8412480" cy="548640"/>
+            <a:ext cx="8412480" cy="457200"/>
           </a:xfrm>
           <a:prstGeom prst="rect">
             <a:avLst/>
@@ -4530,17 +4497,17 @@
               <a:buNone/>
             </a:pPr>
             <a:r>
-              <a:rPr lang="en-US" sz="1400" i="1" dirty="0">
-                <a:solidFill>
-                  <a:srgbClr val="212121"/>
-                </a:solidFill>
-                <a:latin typeface="Calibri" pitchFamily="34" charset="0"/>
-                <a:ea typeface="Calibri" pitchFamily="34" charset="-122"/>
-                <a:cs typeface="Calibri" pitchFamily="34" charset="-120"/>
-              </a:rPr>
-              <a:t>The workshop ends with a team capstone. Start thinking about your scenario this week — every day gives you a piece.</a:t>
-            </a:r>
-            <a:endParaRPr lang="en-US" sz="1400" dirty="0"/>
+              <a:rPr lang="en-US" sz="1300" i="1" dirty="0">
+                <a:solidFill>
+                  <a:srgbClr val="212121"/>
+                </a:solidFill>
+                <a:latin typeface="Calibri" pitchFamily="34" charset="0"/>
+                <a:ea typeface="Calibri" pitchFamily="34" charset="-122"/>
+                <a:cs typeface="Calibri" pitchFamily="34" charset="-120"/>
+              </a:rPr>
+              <a:t>The workshop ends with a team capstone. Start thinking about your scenario — every day gives you a piece.</a:t>
+            </a:r>
+            <a:endParaRPr lang="en-US" sz="1300" dirty="0"/>
           </a:p>
         </p:txBody>
       </p:sp>
@@ -4552,7 +4519,7 @@
         </p:nvSpPr>
         <p:spPr>
           <a:xfrm>
-            <a:off x="365760" y="1691640"/>
+            <a:off x="365760" y="1508760"/>
             <a:ext cx="4069080" cy="365760"/>
           </a:xfrm>
           <a:prstGeom prst="rect">
@@ -4591,7 +4558,7 @@
         </p:nvSpPr>
         <p:spPr>
           <a:xfrm>
-            <a:off x="4709160" y="1691640"/>
+            <a:off x="4709160" y="1508760"/>
             <a:ext cx="4069080" cy="365760"/>
           </a:xfrm>
           <a:prstGeom prst="rect">
@@ -4616,7 +4583,7 @@
                 <a:ea typeface="Calibri" pitchFamily="34" charset="-122"/>
                 <a:cs typeface="Calibri" pitchFamily="34" charset="-120"/>
               </a:rPr>
-              <a:t>Required elements (each day gives you a piece)</a:t>
+              <a:t>Required elements</a:t>
             </a:r>
             <a:endParaRPr lang="en-US" sz="2000" dirty="0"/>
           </a:p>
@@ -4630,8 +4597,8 @@
         </p:nvSpPr>
         <p:spPr>
           <a:xfrm>
-            <a:off x="365760" y="2148840"/>
-            <a:ext cx="4069080" cy="2286000"/>
+            <a:off x="365760" y="1965960"/>
+            <a:ext cx="4069080" cy="2423160"/>
           </a:xfrm>
           <a:prstGeom prst="rect">
             <a:avLst/>
@@ -4659,7 +4626,7 @@
                 <a:ea typeface="Calibri" pitchFamily="34" charset="-122"/>
                 <a:cs typeface="Calibri" pitchFamily="34" charset="-120"/>
               </a:rPr>
-              <a:t>Teams of 2–3 · everyone participates</a:t>
+              <a:t>Teams of 2–3</a:t>
             </a:r>
             <a:endParaRPr lang="en-US" sz="1500" dirty="0"/>
           </a:p>
@@ -4680,7 +4647,7 @@
                 <a:ea typeface="Calibri" pitchFamily="34" charset="-122"/>
                 <a:cs typeface="Calibri" pitchFamily="34" charset="-120"/>
               </a:rPr>
-              <a:t>Starts at Day 5 close · demo day 2–3 weeks after</a:t>
+              <a:t>Starts at Day 5 close · demo day 2–3 weeks later</a:t>
             </a:r>
             <a:endParaRPr lang="en-US" sz="1500" dirty="0"/>
           </a:p>
@@ -4701,7 +4668,7 @@
                 <a:ea typeface="Calibri" pitchFamily="34" charset="-122"/>
                 <a:cs typeface="Calibri" pitchFamily="34" charset="-120"/>
               </a:rPr>
-              <a:t>Shared demo day — all teams present to Pradeep + Jim</a:t>
+              <a:t>Shared demo day — teams present to Pradeep + Jim</a:t>
             </a:r>
             <a:endParaRPr lang="en-US" sz="1500" dirty="0"/>
           </a:p>
@@ -4722,7 +4689,7 @@
                 <a:ea typeface="Calibri" pitchFamily="34" charset="-122"/>
                 <a:cs typeface="Calibri" pitchFamily="34" charset="-120"/>
               </a:rPr>
-              <a:t>~15 min per team (10 demo + 5 Q&amp;A + coaching)</a:t>
+              <a:t>~15 min per team (10 demo + 5 Q&amp;A)</a:t>
             </a:r>
             <a:endParaRPr lang="en-US" sz="1500" dirty="0"/>
           </a:p>
@@ -4743,7 +4710,7 @@
                 <a:ea typeface="Calibri" pitchFamily="34" charset="-122"/>
                 <a:cs typeface="Calibri" pitchFamily="34" charset="-120"/>
               </a:rPr>
-              <a:t>Coaching and feedback — no competitive scoring</a:t>
+              <a:t>Coaching and feedback — no scoring</a:t>
             </a:r>
             <a:endParaRPr lang="en-US" sz="1500" dirty="0"/>
           </a:p>
@@ -4778,8 +4745,8 @@
         </p:nvSpPr>
         <p:spPr>
           <a:xfrm>
-            <a:off x="4709160" y="2148840"/>
-            <a:ext cx="4069080" cy="2286000"/>
+            <a:off x="4709160" y="1965960"/>
+            <a:ext cx="4069080" cy="2423160"/>
           </a:xfrm>
           <a:prstGeom prst="rect">
             <a:avLst/>
@@ -4807,7 +4774,7 @@
                 <a:ea typeface="Calibri" pitchFamily="34" charset="-122"/>
                 <a:cs typeface="Calibri" pitchFamily="34" charset="-120"/>
               </a:rPr>
-              <a:t>An MAF agent (Prompt agent, Hosted agent, or Path C)</a:t>
+              <a:t>An MAF agent — Foundry-hosted or self-hosted</a:t>
             </a:r>
             <a:endParaRPr lang="en-US" sz="1500" dirty="0"/>
           </a:p>
@@ -4849,7 +4816,7 @@
                 <a:ea typeface="Calibri" pitchFamily="34" charset="-122"/>
                 <a:cs typeface="Calibri" pitchFamily="34" charset="-120"/>
               </a:rPr>
-              <a:t>At least one Toolbox tool, MCP server, or function tool</a:t>
+              <a:t>≥1 Toolbox tool, MCP server, or function tool</a:t>
             </a:r>
             <a:endParaRPr lang="en-US" sz="1500" dirty="0"/>
           </a:p>
@@ -4870,7 +4837,7 @@
                 <a:ea typeface="Calibri" pitchFamily="34" charset="-122"/>
                 <a:cs typeface="Calibri" pitchFamily="34" charset="-120"/>
               </a:rPr>
-              <a:t>At least one Foundry IQ source or custom RAG</a:t>
+              <a:t>≥1 Foundry IQ source or custom RAG</a:t>
             </a:r>
             <a:endParaRPr lang="en-US" sz="1500" dirty="0"/>
           </a:p>
@@ -4891,7 +4858,7 @@
                 <a:ea typeface="Calibri" pitchFamily="34" charset="-122"/>
                 <a:cs typeface="Calibri" pitchFamily="34" charset="-120"/>
               </a:rPr>
-              <a:t>A golden set of ≥10 items + captured eval score</a:t>
+              <a:t>Golden set of ≥10 items + captured eval score</a:t>
             </a:r>
             <a:endParaRPr lang="en-US" sz="1500" dirty="0"/>
           </a:p>
@@ -4912,7 +4879,7 @@
                 <a:ea typeface="Calibri" pitchFamily="34" charset="-122"/>
                 <a:cs typeface="Calibri" pitchFamily="34" charset="-120"/>
               </a:rPr>
-              <a:t>OTel traces visible in the portal or App Insights</a:t>
+              <a:t>OTel traces in the portal or App Insights</a:t>
             </a:r>
             <a:endParaRPr lang="en-US" sz="1500" dirty="0"/>
           </a:p>
@@ -4947,7 +4914,7 @@
         </p:nvSpPr>
         <p:spPr>
           <a:xfrm>
-            <a:off x="365760" y="4526280"/>
+            <a:off x="365760" y="4572000"/>
             <a:ext cx="8412480" cy="457200"/>
           </a:xfrm>
           <a:prstGeom prst="rect">
@@ -4967,7 +4934,7 @@
         </p:nvSpPr>
         <p:spPr>
           <a:xfrm>
-            <a:off x="502920" y="4553712"/>
+            <a:off x="502920" y="4599432"/>
             <a:ext cx="8138160" cy="402336"/>
           </a:xfrm>
           <a:prstGeom prst="rect">

--- a/decks/day1/module-7-lab-kickoff.pptx
+++ b/decks/day1/module-7-lab-kickoff.pptx
@@ -1350,7 +1350,7 @@
 • Workshop timing: workshop ends wk of Oct 12; demo day lands wk of Nov 2 or Nov 9
 • Format: shared demo day, not 1:1 reviews
 •   ~15 min per team (10 demo + 5 Q&amp;A / coaching)
-•   Pradeep + Jim attend; attendees also see each other's work
+•   The workshop owners and participants attend; attendees also see each other's work
 • Character stays coaching + feedback — no ranking, no scoring
 • Every required element maps to a day of the workshop:
 •   MAF agent → Day 1
@@ -2599,11 +2599,11 @@
             <a:avLst/>
           </a:prstGeom>
           <a:solidFill>
-            <a:srgbClr val="F3F4F6"/>
+            <a:srgbClr val="1D1E22"/>
           </a:solidFill>
-          <a:ln w="6350">
+          <a:ln w="9525">
             <a:solidFill>
-              <a:srgbClr val="D1D5DB"/>
+              <a:srgbClr val="2A2B2E"/>
             </a:solidFill>
             <a:prstDash val="solid"/>
           </a:ln>
@@ -2627,7 +2627,9 @@
           <a:ln/>
         </p:spPr>
         <p:txBody>
-          <a:bodyPr wrap="square" lIns="0" tIns="0" rIns="0" bIns="0" rtlCol="0" anchor="t"/>
+          <a:bodyPr wrap="square" lIns="0" tIns="0" rIns="0" bIns="0" rtlCol="0" anchor="t">
+            <a:normAutofit/>
+          </a:bodyPr>
           <a:lstStyle/>
           <a:p>
             <a:pPr indent="0" marL="0">
@@ -2636,7 +2638,7 @@
             <a:r>
               <a:rPr lang="en-US" sz="1300" dirty="0">
                 <a:solidFill>
-                  <a:srgbClr val="212121"/>
+                  <a:srgbClr val="FFFFFF"/>
                 </a:solidFill>
                 <a:latin typeface="Consolas" pitchFamily="34" charset="0"/>
                 <a:ea typeface="Consolas" pitchFamily="34" charset="-122"/>
@@ -2653,7 +2655,7 @@
             <a:r>
               <a:rPr lang="en-US" sz="1300" dirty="0">
                 <a:solidFill>
-                  <a:srgbClr val="212121"/>
+                  <a:srgbClr val="FFFFFF"/>
                 </a:solidFill>
                 <a:latin typeface="Consolas" pitchFamily="34" charset="0"/>
                 <a:ea typeface="Consolas" pitchFamily="34" charset="-122"/>
@@ -2670,30 +2672,27 @@
             <a:r>
               <a:rPr lang="en-US" sz="1300" dirty="0">
                 <a:solidFill>
-                  <a:srgbClr val="212121"/>
+                  <a:srgbClr val="FFFFFF"/>
                 </a:solidFill>
                 <a:latin typeface="Consolas" pitchFamily="34" charset="0"/>
                 <a:ea typeface="Consolas" pitchFamily="34" charset="-122"/>
                 <a:cs typeface="Consolas" pitchFamily="34" charset="-120"/>
               </a:rPr>
-              <a:t>azd version              # Azure Developer CLI (used from Day 3 onward)</a:t>
-            </a:r>
-            <a:endParaRPr lang="en-US" sz="1300" dirty="0"/>
-          </a:p>
-          <a:p>
+              <a:t>azd version              </a:t>
+            </a:r>
             <a:pPr indent="0" marL="0">
               <a:buNone/>
             </a:pPr>
             <a:r>
-              <a:rPr lang="en-US" sz="1300" dirty="0">
-                <a:solidFill>
-                  <a:srgbClr val="212121"/>
+              <a:rPr lang="en-US" sz="1300" i="1" dirty="0">
+                <a:solidFill>
+                  <a:srgbClr val="666666"/>
                 </a:solidFill>
                 <a:latin typeface="Consolas" pitchFamily="34" charset="0"/>
                 <a:ea typeface="Consolas" pitchFamily="34" charset="-122"/>
                 <a:cs typeface="Consolas" pitchFamily="34" charset="-120"/>
               </a:rPr>
-              <a:t>python --version         # 3.11+</a:t>
+              <a:t># Azure Developer CLI (used from Day 3 onward)</a:t>
             </a:r>
             <a:endParaRPr lang="en-US" sz="1300" dirty="0"/>
           </a:p>
@@ -2704,13 +2703,58 @@
             <a:r>
               <a:rPr lang="en-US" sz="1300" dirty="0">
                 <a:solidFill>
-                  <a:srgbClr val="212121"/>
+                  <a:srgbClr val="FFFFFF"/>
                 </a:solidFill>
                 <a:latin typeface="Consolas" pitchFamily="34" charset="0"/>
                 <a:ea typeface="Consolas" pitchFamily="34" charset="-122"/>
                 <a:cs typeface="Consolas" pitchFamily="34" charset="-120"/>
               </a:rPr>
-              <a:t>uv --version             # required for Python labs</a:t>
+              <a:t>python --version         </a:t>
+            </a:r>
+            <a:pPr indent="0" marL="0">
+              <a:buNone/>
+            </a:pPr>
+            <a:r>
+              <a:rPr lang="en-US" sz="1300" i="1" dirty="0">
+                <a:solidFill>
+                  <a:srgbClr val="666666"/>
+                </a:solidFill>
+                <a:latin typeface="Consolas" pitchFamily="34" charset="0"/>
+                <a:ea typeface="Consolas" pitchFamily="34" charset="-122"/>
+                <a:cs typeface="Consolas" pitchFamily="34" charset="-120"/>
+              </a:rPr>
+              <a:t># 3.11+</a:t>
+            </a:r>
+            <a:endParaRPr lang="en-US" sz="1300" dirty="0"/>
+          </a:p>
+          <a:p>
+            <a:pPr indent="0" marL="0">
+              <a:buNone/>
+            </a:pPr>
+            <a:r>
+              <a:rPr lang="en-US" sz="1300" dirty="0">
+                <a:solidFill>
+                  <a:srgbClr val="FFFFFF"/>
+                </a:solidFill>
+                <a:latin typeface="Consolas" pitchFamily="34" charset="0"/>
+                <a:ea typeface="Consolas" pitchFamily="34" charset="-122"/>
+                <a:cs typeface="Consolas" pitchFamily="34" charset="-120"/>
+              </a:rPr>
+              <a:t>uv --version             </a:t>
+            </a:r>
+            <a:pPr indent="0" marL="0">
+              <a:buNone/>
+            </a:pPr>
+            <a:r>
+              <a:rPr lang="en-US" sz="1300" i="1" dirty="0">
+                <a:solidFill>
+                  <a:srgbClr val="666666"/>
+                </a:solidFill>
+                <a:latin typeface="Consolas" pitchFamily="34" charset="0"/>
+                <a:ea typeface="Consolas" pitchFamily="34" charset="-122"/>
+                <a:cs typeface="Consolas" pitchFamily="34" charset="-120"/>
+              </a:rPr>
+              <a:t># required for Python labs</a:t>
             </a:r>
             <a:endParaRPr lang="en-US" sz="1300" dirty="0"/>
           </a:p>
@@ -2964,11 +3008,11 @@
             <a:avLst/>
           </a:prstGeom>
           <a:solidFill>
-            <a:srgbClr val="F3F4F6"/>
+            <a:srgbClr val="1D1E22"/>
           </a:solidFill>
-          <a:ln w="6350">
+          <a:ln w="9525">
             <a:solidFill>
-              <a:srgbClr val="D1D5DB"/>
+              <a:srgbClr val="2A2B2E"/>
             </a:solidFill>
             <a:prstDash val="solid"/>
           </a:ln>
@@ -2992,7 +3036,9 @@
           <a:ln/>
         </p:spPr>
         <p:txBody>
-          <a:bodyPr wrap="square" lIns="0" tIns="0" rIns="0" bIns="0" rtlCol="0" anchor="t"/>
+          <a:bodyPr wrap="square" lIns="0" tIns="0" rIns="0" bIns="0" rtlCol="0" anchor="t">
+            <a:normAutofit/>
+          </a:bodyPr>
           <a:lstStyle/>
           <a:p>
             <a:pPr indent="0" marL="0">
@@ -3001,53 +3047,41 @@
             <a:r>
               <a:rPr lang="en-US" sz="1300" dirty="0">
                 <a:solidFill>
-                  <a:srgbClr val="212121"/>
+                  <a:srgbClr val="FFFFFF"/>
                 </a:solidFill>
                 <a:latin typeface="Consolas" pitchFamily="34" charset="0"/>
                 <a:ea typeface="Consolas" pitchFamily="34" charset="-122"/>
                 <a:cs typeface="Consolas" pitchFamily="34" charset="-120"/>
               </a:rPr>
-              <a:t>git clone https://github.com/JimPiquant/Building-AI-Apps-and-Agents.git</a:t>
-            </a:r>
-            <a:endParaRPr lang="en-US" sz="1300" dirty="0"/>
-          </a:p>
-          <a:p>
+              <a:t>git clone https://github.com/JimPiquant/Building-AI-Apps-</a:t>
+            </a:r>
             <a:pPr indent="0" marL="0">
               <a:buNone/>
             </a:pPr>
             <a:r>
               <a:rPr lang="en-US" sz="1300" dirty="0">
                 <a:solidFill>
-                  <a:srgbClr val="212121"/>
+                  <a:srgbClr val="A996B6"/>
                 </a:solidFill>
                 <a:latin typeface="Consolas" pitchFamily="34" charset="0"/>
                 <a:ea typeface="Consolas" pitchFamily="34" charset="-122"/>
                 <a:cs typeface="Consolas" pitchFamily="34" charset="-120"/>
               </a:rPr>
-              <a:t>cd Building-AI-Apps-and-Agents/labs/day1</a:t>
-            </a:r>
-            <a:endParaRPr lang="en-US" sz="1300" dirty="0"/>
-          </a:p>
-          <a:p>
+              <a:t>and</a:t>
+            </a:r>
             <a:pPr indent="0" marL="0">
               <a:buNone/>
             </a:pPr>
-            <a:endParaRPr lang="en-US" sz="1300" dirty="0"/>
-          </a:p>
-          <a:p>
-            <a:pPr indent="0" marL="0">
-              <a:buNone/>
-            </a:pPr>
             <a:r>
               <a:rPr lang="en-US" sz="1300" dirty="0">
                 <a:solidFill>
-                  <a:srgbClr val="212121"/>
+                  <a:srgbClr val="FFFFFF"/>
                 </a:solidFill>
                 <a:latin typeface="Consolas" pitchFamily="34" charset="0"/>
                 <a:ea typeface="Consolas" pitchFamily="34" charset="-122"/>
                 <a:cs typeface="Consolas" pitchFamily="34" charset="-120"/>
               </a:rPr>
-              <a:t># copy env template and fill in your values</a:t>
+              <a:t>-Agents.git</a:t>
             </a:r>
             <a:endParaRPr lang="en-US" sz="1300" dirty="0"/>
           </a:p>
@@ -3058,12 +3092,80 @@
             <a:r>
               <a:rPr lang="en-US" sz="1300" dirty="0">
                 <a:solidFill>
-                  <a:srgbClr val="212121"/>
+                  <a:srgbClr val="FFFFFF"/>
                 </a:solidFill>
                 <a:latin typeface="Consolas" pitchFamily="34" charset="0"/>
                 <a:ea typeface="Consolas" pitchFamily="34" charset="-122"/>
                 <a:cs typeface="Consolas" pitchFamily="34" charset="-120"/>
               </a:rPr>
+              <a:t>cd Building-AI-Apps-</a:t>
+            </a:r>
+            <a:pPr indent="0" marL="0">
+              <a:buNone/>
+            </a:pPr>
+            <a:r>
+              <a:rPr lang="en-US" sz="1300" dirty="0">
+                <a:solidFill>
+                  <a:srgbClr val="A996B6"/>
+                </a:solidFill>
+                <a:latin typeface="Consolas" pitchFamily="34" charset="0"/>
+                <a:ea typeface="Consolas" pitchFamily="34" charset="-122"/>
+                <a:cs typeface="Consolas" pitchFamily="34" charset="-120"/>
+              </a:rPr>
+              <a:t>and</a:t>
+            </a:r>
+            <a:pPr indent="0" marL="0">
+              <a:buNone/>
+            </a:pPr>
+            <a:r>
+              <a:rPr lang="en-US" sz="1300" dirty="0">
+                <a:solidFill>
+                  <a:srgbClr val="FFFFFF"/>
+                </a:solidFill>
+                <a:latin typeface="Consolas" pitchFamily="34" charset="0"/>
+                <a:ea typeface="Consolas" pitchFamily="34" charset="-122"/>
+                <a:cs typeface="Consolas" pitchFamily="34" charset="-120"/>
+              </a:rPr>
+              <a:t>-Agents/labs/day1</a:t>
+            </a:r>
+            <a:endParaRPr lang="en-US" sz="1300" dirty="0"/>
+          </a:p>
+          <a:p>
+            <a:pPr indent="0" marL="0">
+              <a:buNone/>
+            </a:pPr>
+            <a:endParaRPr lang="en-US" sz="1300" dirty="0"/>
+          </a:p>
+          <a:p>
+            <a:pPr indent="0" marL="0">
+              <a:buNone/>
+            </a:pPr>
+            <a:r>
+              <a:rPr lang="en-US" sz="1300" i="1" dirty="0">
+                <a:solidFill>
+                  <a:srgbClr val="666666"/>
+                </a:solidFill>
+                <a:latin typeface="Consolas" pitchFamily="34" charset="0"/>
+                <a:ea typeface="Consolas" pitchFamily="34" charset="-122"/>
+                <a:cs typeface="Consolas" pitchFamily="34" charset="-120"/>
+              </a:rPr>
+              <a:t># copy env template and fill in your values</a:t>
+            </a:r>
+            <a:endParaRPr lang="en-US" sz="1300" dirty="0"/>
+          </a:p>
+          <a:p>
+            <a:pPr indent="0" marL="0">
+              <a:buNone/>
+            </a:pPr>
+            <a:r>
+              <a:rPr lang="en-US" sz="1300" dirty="0">
+                <a:solidFill>
+                  <a:srgbClr val="FFFFFF"/>
+                </a:solidFill>
+                <a:latin typeface="Consolas" pitchFamily="34" charset="0"/>
+                <a:ea typeface="Consolas" pitchFamily="34" charset="-122"/>
+                <a:cs typeface="Consolas" pitchFamily="34" charset="-120"/>
+              </a:rPr>
               <a:t>cp .env.example .env</a:t>
             </a:r>
             <a:endParaRPr lang="en-US" sz="1300" dirty="0"/>
@@ -3124,11 +3226,11 @@
             <a:avLst/>
           </a:prstGeom>
           <a:solidFill>
-            <a:srgbClr val="F3F4F6"/>
+            <a:srgbClr val="1D1E22"/>
           </a:solidFill>
-          <a:ln w="6350">
+          <a:ln w="9525">
             <a:solidFill>
-              <a:srgbClr val="D1D5DB"/>
+              <a:srgbClr val="2A2B2E"/>
             </a:solidFill>
             <a:prstDash val="solid"/>
           </a:ln>
@@ -3152,7 +3254,9 @@
           <a:ln/>
         </p:spPr>
         <p:txBody>
-          <a:bodyPr wrap="square" lIns="0" tIns="0" rIns="0" bIns="0" rtlCol="0" anchor="t"/>
+          <a:bodyPr wrap="square" lIns="0" tIns="0" rIns="0" bIns="0" rtlCol="0" anchor="t">
+            <a:normAutofit/>
+          </a:bodyPr>
           <a:lstStyle/>
           <a:p>
             <a:pPr indent="0" marL="0">
@@ -3161,7 +3265,7 @@
             <a:r>
               <a:rPr lang="en-US" sz="1200" dirty="0">
                 <a:solidFill>
-                  <a:srgbClr val="212121"/>
+                  <a:srgbClr val="FFFFFF"/>
                 </a:solidFill>
                 <a:latin typeface="Consolas" pitchFamily="34" charset="0"/>
                 <a:ea typeface="Consolas" pitchFamily="34" charset="-122"/>
@@ -3178,7 +3282,7 @@
             <a:r>
               <a:rPr lang="en-US" sz="1200" dirty="0">
                 <a:solidFill>
-                  <a:srgbClr val="212121"/>
+                  <a:srgbClr val="FFFFFF"/>
                 </a:solidFill>
                 <a:latin typeface="Consolas" pitchFamily="34" charset="0"/>
                 <a:ea typeface="Consolas" pitchFamily="34" charset="-122"/>
@@ -3195,7 +3299,7 @@
             <a:r>
               <a:rPr lang="en-US" sz="1200" dirty="0">
                 <a:solidFill>
-                  <a:srgbClr val="212121"/>
+                  <a:srgbClr val="FFFFFF"/>
                 </a:solidFill>
                 <a:latin typeface="Consolas" pitchFamily="34" charset="0"/>
                 <a:ea typeface="Consolas" pitchFamily="34" charset="-122"/>
@@ -3212,7 +3316,7 @@
             <a:r>
               <a:rPr lang="en-US" sz="1200" dirty="0">
                 <a:solidFill>
-                  <a:srgbClr val="212121"/>
+                  <a:srgbClr val="FFFFFF"/>
                 </a:solidFill>
                 <a:latin typeface="Consolas" pitchFamily="34" charset="0"/>
                 <a:ea typeface="Consolas" pitchFamily="34" charset="-122"/>
@@ -3229,7 +3333,7 @@
             <a:r>
               <a:rPr lang="en-US" sz="1200" dirty="0">
                 <a:solidFill>
-                  <a:srgbClr val="212121"/>
+                  <a:srgbClr val="FFFFFF"/>
                 </a:solidFill>
                 <a:latin typeface="Consolas" pitchFamily="34" charset="0"/>
                 <a:ea typeface="Consolas" pitchFamily="34" charset="-122"/>
@@ -3246,7 +3350,7 @@
             <a:r>
               <a:rPr lang="en-US" sz="1200" dirty="0">
                 <a:solidFill>
-                  <a:srgbClr val="212121"/>
+                  <a:srgbClr val="FFFFFF"/>
                 </a:solidFill>
                 <a:latin typeface="Consolas" pitchFamily="34" charset="0"/>
                 <a:ea typeface="Consolas" pitchFamily="34" charset="-122"/>
@@ -3263,7 +3367,7 @@
             <a:r>
               <a:rPr lang="en-US" sz="1200" dirty="0">
                 <a:solidFill>
-                  <a:srgbClr val="212121"/>
+                  <a:srgbClr val="FFFFFF"/>
                 </a:solidFill>
                 <a:latin typeface="Consolas" pitchFamily="34" charset="0"/>
                 <a:ea typeface="Consolas" pitchFamily="34" charset="-122"/>
@@ -4668,7 +4772,7 @@
                 <a:ea typeface="Calibri" pitchFamily="34" charset="-122"/>
                 <a:cs typeface="Calibri" pitchFamily="34" charset="-120"/>
               </a:rPr>
-              <a:t>Shared demo day — teams present to Pradeep + Jim</a:t>
+              <a:t>Shared demo day — teams present to the workshop owners and participants</a:t>
             </a:r>
             <a:endParaRPr lang="en-US" sz="1500" dirty="0"/>
           </a:p>
